--- a/BÁO CÁO ĐƯỜNG MẠNG DỰ PHÒNG MOBIPHONE.pptx
+++ b/BÁO CÁO ĐƯỜNG MẠNG DỰ PHÒNG MOBIPHONE.pptx
@@ -5,24 +5,25 @@
     <p:sldMasterId id="2147483648" r:id="rId1"/>
   </p:sldMasterIdLst>
   <p:notesMasterIdLst>
-    <p:notesMasterId r:id="rId17"/>
+    <p:notesMasterId r:id="rId18"/>
   </p:notesMasterIdLst>
   <p:sldIdLst>
     <p:sldId id="299" r:id="rId2"/>
     <p:sldId id="318" r:id="rId3"/>
     <p:sldId id="319" r:id="rId4"/>
-    <p:sldId id="326" r:id="rId5"/>
-    <p:sldId id="329" r:id="rId6"/>
-    <p:sldId id="330" r:id="rId7"/>
-    <p:sldId id="327" r:id="rId8"/>
-    <p:sldId id="328" r:id="rId9"/>
-    <p:sldId id="320" r:id="rId10"/>
-    <p:sldId id="321" r:id="rId11"/>
-    <p:sldId id="322" r:id="rId12"/>
-    <p:sldId id="323" r:id="rId13"/>
-    <p:sldId id="324" r:id="rId14"/>
-    <p:sldId id="325" r:id="rId15"/>
-    <p:sldId id="303" r:id="rId16"/>
+    <p:sldId id="331" r:id="rId5"/>
+    <p:sldId id="326" r:id="rId6"/>
+    <p:sldId id="329" r:id="rId7"/>
+    <p:sldId id="330" r:id="rId8"/>
+    <p:sldId id="327" r:id="rId9"/>
+    <p:sldId id="328" r:id="rId10"/>
+    <p:sldId id="320" r:id="rId11"/>
+    <p:sldId id="321" r:id="rId12"/>
+    <p:sldId id="322" r:id="rId13"/>
+    <p:sldId id="323" r:id="rId14"/>
+    <p:sldId id="324" r:id="rId15"/>
+    <p:sldId id="325" r:id="rId16"/>
+    <p:sldId id="303" r:id="rId17"/>
   </p:sldIdLst>
   <p:sldSz cx="9144000" cy="6858000" type="screen4x3"/>
   <p:notesSz cx="7102475" cy="9388475"/>
@@ -694,7 +695,7 @@
     </p:spTree>
     <p:extLst>
       <p:ext uri="{BB962C8B-B14F-4D97-AF65-F5344CB8AC3E}">
-        <p14:creationId xmlns:p14="http://schemas.microsoft.com/office/powerpoint/2010/main" val="3459768397"/>
+        <p14:creationId xmlns:p14="http://schemas.microsoft.com/office/powerpoint/2010/main" val="1676789804"/>
       </p:ext>
     </p:extLst>
   </p:cSld>
@@ -780,7 +781,7 @@
     </p:spTree>
     <p:extLst>
       <p:ext uri="{BB962C8B-B14F-4D97-AF65-F5344CB8AC3E}">
-        <p14:creationId xmlns:p14="http://schemas.microsoft.com/office/powerpoint/2010/main" val="3463541452"/>
+        <p14:creationId xmlns:p14="http://schemas.microsoft.com/office/powerpoint/2010/main" val="3459768397"/>
       </p:ext>
     </p:extLst>
   </p:cSld>
@@ -866,7 +867,7 @@
     </p:spTree>
     <p:extLst>
       <p:ext uri="{BB962C8B-B14F-4D97-AF65-F5344CB8AC3E}">
-        <p14:creationId xmlns:p14="http://schemas.microsoft.com/office/powerpoint/2010/main" val="3324588441"/>
+        <p14:creationId xmlns:p14="http://schemas.microsoft.com/office/powerpoint/2010/main" val="3463541452"/>
       </p:ext>
     </p:extLst>
   </p:cSld>
@@ -952,7 +953,7 @@
     </p:spTree>
     <p:extLst>
       <p:ext uri="{BB962C8B-B14F-4D97-AF65-F5344CB8AC3E}">
-        <p14:creationId xmlns:p14="http://schemas.microsoft.com/office/powerpoint/2010/main" val="3308229335"/>
+        <p14:creationId xmlns:p14="http://schemas.microsoft.com/office/powerpoint/2010/main" val="3324588441"/>
       </p:ext>
     </p:extLst>
   </p:cSld>
@@ -1030,6 +1031,92 @@
             <a:fld id="{90A3BDCA-6087-4642-B128-7FBC3DE52056}" type="slidenum">
               <a:rPr kumimoji="1" lang="ja-JP" altLang="en-US" smtClean="0"/>
               <a:t>14</a:t>
+            </a:fld>
+            <a:endParaRPr kumimoji="1" lang="ja-JP" altLang="en-US"/>
+          </a:p>
+        </p:txBody>
+      </p:sp>
+    </p:spTree>
+    <p:extLst>
+      <p:ext uri="{BB962C8B-B14F-4D97-AF65-F5344CB8AC3E}">
+        <p14:creationId xmlns:p14="http://schemas.microsoft.com/office/powerpoint/2010/main" val="3308229335"/>
+      </p:ext>
+    </p:extLst>
+  </p:cSld>
+  <p:clrMapOvr>
+    <a:masterClrMapping/>
+  </p:clrMapOvr>
+</p:notes>
+</file>
+
+<file path=ppt/notesSlides/notesSlide15.xml><?xml version="1.0" encoding="utf-8"?>
+<p:notes xmlns:a="http://schemas.openxmlformats.org/drawingml/2006/main" xmlns:r="http://schemas.openxmlformats.org/officeDocument/2006/relationships" xmlns:p="http://schemas.openxmlformats.org/presentationml/2006/main">
+  <p:cSld>
+    <p:spTree>
+      <p:nvGrpSpPr>
+        <p:cNvPr id="1" name=""/>
+        <p:cNvGrpSpPr/>
+        <p:nvPr/>
+      </p:nvGrpSpPr>
+      <p:grpSpPr>
+        <a:xfrm>
+          <a:off x="0" y="0"/>
+          <a:ext cx="0" cy="0"/>
+          <a:chOff x="0" y="0"/>
+          <a:chExt cx="0" cy="0"/>
+        </a:xfrm>
+      </p:grpSpPr>
+      <p:sp>
+        <p:nvSpPr>
+          <p:cNvPr id="2" name="Slide Image Placeholder 1"/>
+          <p:cNvSpPr>
+            <a:spLocks noGrp="1" noRot="1" noChangeAspect="1"/>
+          </p:cNvSpPr>
+          <p:nvPr>
+            <p:ph type="sldImg"/>
+          </p:nvPr>
+        </p:nvSpPr>
+        <p:spPr/>
+      </p:sp>
+      <p:sp>
+        <p:nvSpPr>
+          <p:cNvPr id="3" name="Notes Placeholder 2"/>
+          <p:cNvSpPr>
+            <a:spLocks noGrp="1"/>
+          </p:cNvSpPr>
+          <p:nvPr>
+            <p:ph type="body" idx="1"/>
+          </p:nvPr>
+        </p:nvSpPr>
+        <p:spPr/>
+        <p:txBody>
+          <a:bodyPr>
+            <a:normAutofit/>
+          </a:bodyPr>
+          <a:lstStyle/>
+          <a:p>
+            <a:endParaRPr lang="en-US"/>
+          </a:p>
+        </p:txBody>
+      </p:sp>
+      <p:sp>
+        <p:nvSpPr>
+          <p:cNvPr id="4" name="Slide Number Placeholder 3"/>
+          <p:cNvSpPr>
+            <a:spLocks noGrp="1"/>
+          </p:cNvSpPr>
+          <p:nvPr>
+            <p:ph type="sldNum" sz="quarter" idx="10"/>
+          </p:nvPr>
+        </p:nvSpPr>
+        <p:spPr/>
+        <p:txBody>
+          <a:bodyPr/>
+          <a:lstStyle/>
+          <a:p>
+            <a:fld id="{90A3BDCA-6087-4642-B128-7FBC3DE52056}" type="slidenum">
+              <a:rPr kumimoji="1" lang="ja-JP" altLang="en-US" smtClean="0"/>
+              <a:t>15</a:t>
             </a:fld>
             <a:endParaRPr kumimoji="1" lang="ja-JP" altLang="en-US"/>
           </a:p>
@@ -1296,7 +1383,7 @@
     </p:spTree>
     <p:extLst>
       <p:ext uri="{BB962C8B-B14F-4D97-AF65-F5344CB8AC3E}">
-        <p14:creationId xmlns:p14="http://schemas.microsoft.com/office/powerpoint/2010/main" val="1667023939"/>
+        <p14:creationId xmlns:p14="http://schemas.microsoft.com/office/powerpoint/2010/main" val="2935102026"/>
       </p:ext>
     </p:extLst>
   </p:cSld>
@@ -1382,7 +1469,7 @@
     </p:spTree>
     <p:extLst>
       <p:ext uri="{BB962C8B-B14F-4D97-AF65-F5344CB8AC3E}">
-        <p14:creationId xmlns:p14="http://schemas.microsoft.com/office/powerpoint/2010/main" val="3629269969"/>
+        <p14:creationId xmlns:p14="http://schemas.microsoft.com/office/powerpoint/2010/main" val="1667023939"/>
       </p:ext>
     </p:extLst>
   </p:cSld>
@@ -1468,7 +1555,7 @@
     </p:spTree>
     <p:extLst>
       <p:ext uri="{BB962C8B-B14F-4D97-AF65-F5344CB8AC3E}">
-        <p14:creationId xmlns:p14="http://schemas.microsoft.com/office/powerpoint/2010/main" val="3487658942"/>
+        <p14:creationId xmlns:p14="http://schemas.microsoft.com/office/powerpoint/2010/main" val="3629269969"/>
       </p:ext>
     </p:extLst>
   </p:cSld>
@@ -1554,7 +1641,7 @@
     </p:spTree>
     <p:extLst>
       <p:ext uri="{BB962C8B-B14F-4D97-AF65-F5344CB8AC3E}">
-        <p14:creationId xmlns:p14="http://schemas.microsoft.com/office/powerpoint/2010/main" val="3705286108"/>
+        <p14:creationId xmlns:p14="http://schemas.microsoft.com/office/powerpoint/2010/main" val="3487658942"/>
       </p:ext>
     </p:extLst>
   </p:cSld>
@@ -1640,7 +1727,7 @@
     </p:spTree>
     <p:extLst>
       <p:ext uri="{BB962C8B-B14F-4D97-AF65-F5344CB8AC3E}">
-        <p14:creationId xmlns:p14="http://schemas.microsoft.com/office/powerpoint/2010/main" val="3203212404"/>
+        <p14:creationId xmlns:p14="http://schemas.microsoft.com/office/powerpoint/2010/main" val="3705286108"/>
       </p:ext>
     </p:extLst>
   </p:cSld>
@@ -1726,7 +1813,7 @@
     </p:spTree>
     <p:extLst>
       <p:ext uri="{BB962C8B-B14F-4D97-AF65-F5344CB8AC3E}">
-        <p14:creationId xmlns:p14="http://schemas.microsoft.com/office/powerpoint/2010/main" val="1676789804"/>
+        <p14:creationId xmlns:p14="http://schemas.microsoft.com/office/powerpoint/2010/main" val="3203212404"/>
       </p:ext>
     </p:extLst>
   </p:cSld>
@@ -5289,8 +5376,8 @@
         </p:blipFill>
         <p:spPr>
           <a:xfrm>
-            <a:off x="755576" y="1048337"/>
-            <a:ext cx="7344816" cy="4471765"/>
+            <a:off x="611560" y="1124743"/>
+            <a:ext cx="5472608" cy="3331903"/>
           </a:xfrm>
           <a:prstGeom prst="rect">
             <a:avLst/>
@@ -5299,10 +5386,10 @@
       </p:pic>
       <p:sp>
         <p:nvSpPr>
-          <p:cNvPr id="10" name="TextBox 9">
+          <p:cNvPr id="3" name="TextBox 2">
             <a:extLst>
               <a:ext uri="{FF2B5EF4-FFF2-40B4-BE49-F238E27FC236}">
-                <a16:creationId xmlns:a16="http://schemas.microsoft.com/office/drawing/2014/main" id="{6082423F-AA4A-0B14-7F1A-ED5A5F3C50B8}"/>
+                <a16:creationId xmlns:a16="http://schemas.microsoft.com/office/drawing/2014/main" id="{A4CE9D7D-E9A7-F144-2464-6FCFA78452DD}"/>
               </a:ext>
             </a:extLst>
           </p:cNvPr>
@@ -5311,8 +5398,8 @@
         </p:nvSpPr>
         <p:spPr>
           <a:xfrm>
-            <a:off x="467544" y="5520102"/>
-            <a:ext cx="8424936" cy="830997"/>
+            <a:off x="608559" y="4550139"/>
+            <a:ext cx="720080" cy="338554"/>
           </a:xfrm>
           <a:prstGeom prst="rect">
             <a:avLst/>
@@ -5330,7 +5417,7 @@
                 <a:latin typeface="Times New Roman" panose="02020603050405020304" pitchFamily="18" charset="0"/>
                 <a:cs typeface="Times New Roman" panose="02020603050405020304" pitchFamily="18" charset="0"/>
               </a:rPr>
-              <a:t>Hệ thống máy tính của 3 nhà máy đang kết nối với nhau cũng như kết nối với mạng Internet bên ngoài( Google, Zalo, Outlook…) thông qua 3 đường mạng riêng biệt cung cấp bởi nhà mạng VNPT triển khai cho từng nhà máy.</a:t>
+              <a:t>Ví dụ:</a:t>
             </a:r>
           </a:p>
         </p:txBody>
@@ -5338,7 +5425,7 @@
     </p:spTree>
     <p:extLst>
       <p:ext uri="{BB962C8B-B14F-4D97-AF65-F5344CB8AC3E}">
-        <p14:creationId xmlns:p14="http://schemas.microsoft.com/office/powerpoint/2010/main" val="2726240698"/>
+        <p14:creationId xmlns:p14="http://schemas.microsoft.com/office/powerpoint/2010/main" val="3469257942"/>
       </p:ext>
     </p:extLst>
   </p:cSld>
@@ -5498,7 +5585,7 @@
     </p:spTree>
     <p:extLst>
       <p:ext uri="{BB962C8B-B14F-4D97-AF65-F5344CB8AC3E}">
-        <p14:creationId xmlns:p14="http://schemas.microsoft.com/office/powerpoint/2010/main" val="506354744"/>
+        <p14:creationId xmlns:p14="http://schemas.microsoft.com/office/powerpoint/2010/main" val="2726240698"/>
       </p:ext>
     </p:extLst>
   </p:cSld>
@@ -5658,7 +5745,7 @@
     </p:spTree>
     <p:extLst>
       <p:ext uri="{BB962C8B-B14F-4D97-AF65-F5344CB8AC3E}">
-        <p14:creationId xmlns:p14="http://schemas.microsoft.com/office/powerpoint/2010/main" val="1199505138"/>
+        <p14:creationId xmlns:p14="http://schemas.microsoft.com/office/powerpoint/2010/main" val="506354744"/>
       </p:ext>
     </p:extLst>
   </p:cSld>
@@ -5818,7 +5905,7 @@
     </p:spTree>
     <p:extLst>
       <p:ext uri="{BB962C8B-B14F-4D97-AF65-F5344CB8AC3E}">
-        <p14:creationId xmlns:p14="http://schemas.microsoft.com/office/powerpoint/2010/main" val="2203903734"/>
+        <p14:creationId xmlns:p14="http://schemas.microsoft.com/office/powerpoint/2010/main" val="1199505138"/>
       </p:ext>
     </p:extLst>
   </p:cSld>
@@ -5978,7 +6065,7 @@
     </p:spTree>
     <p:extLst>
       <p:ext uri="{BB962C8B-B14F-4D97-AF65-F5344CB8AC3E}">
-        <p14:creationId xmlns:p14="http://schemas.microsoft.com/office/powerpoint/2010/main" val="1371432847"/>
+        <p14:creationId xmlns:p14="http://schemas.microsoft.com/office/powerpoint/2010/main" val="2203903734"/>
       </p:ext>
     </p:extLst>
   </p:cSld>
@@ -6007,6 +6094,166 @@
       </p:grpSpPr>
       <p:sp>
         <p:nvSpPr>
+          <p:cNvPr id="2" name="タイトル 1"/>
+          <p:cNvSpPr>
+            <a:spLocks noGrp="1"/>
+          </p:cNvSpPr>
+          <p:nvPr>
+            <p:ph type="ctrTitle"/>
+          </p:nvPr>
+        </p:nvSpPr>
+        <p:spPr>
+          <a:xfrm>
+            <a:off x="0" y="188640"/>
+            <a:ext cx="4860032" cy="504056"/>
+          </a:xfrm>
+          <a:noFill/>
+        </p:spPr>
+        <p:txBody>
+          <a:bodyPr lIns="0" tIns="36000" rIns="0" bIns="36000" anchor="ctr">
+            <a:noAutofit/>
+          </a:bodyPr>
+          <a:lstStyle/>
+          <a:p>
+            <a:r>
+              <a:rPr lang="en-US" altLang="ja-JP" sz="2200">
+                <a:latin typeface="+mn-lt"/>
+              </a:rPr>
+              <a:t>MÔ HÌNH MẠNG THỰC TẾ CỦA CÔNG TY</a:t>
+            </a:r>
+            <a:endParaRPr kumimoji="1" lang="en-US" altLang="ja-JP" sz="2200" dirty="0">
+              <a:latin typeface="+mn-lt"/>
+            </a:endParaRPr>
+          </a:p>
+        </p:txBody>
+      </p:sp>
+      <p:sp>
+        <p:nvSpPr>
+          <p:cNvPr id="4" name="スライド番号プレースホルダー 3"/>
+          <p:cNvSpPr>
+            <a:spLocks noGrp="1"/>
+          </p:cNvSpPr>
+          <p:nvPr>
+            <p:ph type="sldNum" sz="quarter" idx="12"/>
+          </p:nvPr>
+        </p:nvSpPr>
+        <p:spPr/>
+        <p:txBody>
+          <a:bodyPr/>
+          <a:lstStyle/>
+          <a:p>
+            <a:fld id="{D2D8002D-B5B0-4BAC-B1F6-782DDCCE6D9C}" type="slidenum">
+              <a:rPr kumimoji="1" lang="ja-JP" altLang="en-US" smtClean="0">
+                <a:latin typeface="+mn-lt"/>
+              </a:rPr>
+              <a:t>15</a:t>
+            </a:fld>
+            <a:endParaRPr kumimoji="1" lang="ja-JP" altLang="en-US">
+              <a:latin typeface="+mn-lt"/>
+            </a:endParaRPr>
+          </a:p>
+        </p:txBody>
+      </p:sp>
+      <p:pic>
+        <p:nvPicPr>
+          <p:cNvPr id="9" name="Picture 8">
+            <a:extLst>
+              <a:ext uri="{FF2B5EF4-FFF2-40B4-BE49-F238E27FC236}">
+                <a16:creationId xmlns:a16="http://schemas.microsoft.com/office/drawing/2014/main" id="{ECE600D1-3C78-6923-9B76-65BFE98A3287}"/>
+              </a:ext>
+            </a:extLst>
+          </p:cNvPr>
+          <p:cNvPicPr>
+            <a:picLocks noChangeAspect="1"/>
+          </p:cNvPicPr>
+          <p:nvPr/>
+        </p:nvPicPr>
+        <p:blipFill>
+          <a:blip r:embed="rId3"/>
+          <a:stretch>
+            <a:fillRect/>
+          </a:stretch>
+        </p:blipFill>
+        <p:spPr>
+          <a:xfrm>
+            <a:off x="755576" y="1048337"/>
+            <a:ext cx="7344816" cy="4471765"/>
+          </a:xfrm>
+          <a:prstGeom prst="rect">
+            <a:avLst/>
+          </a:prstGeom>
+        </p:spPr>
+      </p:pic>
+      <p:sp>
+        <p:nvSpPr>
+          <p:cNvPr id="10" name="TextBox 9">
+            <a:extLst>
+              <a:ext uri="{FF2B5EF4-FFF2-40B4-BE49-F238E27FC236}">
+                <a16:creationId xmlns:a16="http://schemas.microsoft.com/office/drawing/2014/main" id="{6082423F-AA4A-0B14-7F1A-ED5A5F3C50B8}"/>
+              </a:ext>
+            </a:extLst>
+          </p:cNvPr>
+          <p:cNvSpPr txBox="1"/>
+          <p:nvPr/>
+        </p:nvSpPr>
+        <p:spPr>
+          <a:xfrm>
+            <a:off x="467544" y="5520102"/>
+            <a:ext cx="8424936" cy="830997"/>
+          </a:xfrm>
+          <a:prstGeom prst="rect">
+            <a:avLst/>
+          </a:prstGeom>
+          <a:noFill/>
+        </p:spPr>
+        <p:txBody>
+          <a:bodyPr wrap="square" rtlCol="0">
+            <a:spAutoFit/>
+          </a:bodyPr>
+          <a:lstStyle/>
+          <a:p>
+            <a:r>
+              <a:rPr lang="en-US" sz="1600">
+                <a:latin typeface="Times New Roman" panose="02020603050405020304" pitchFamily="18" charset="0"/>
+                <a:cs typeface="Times New Roman" panose="02020603050405020304" pitchFamily="18" charset="0"/>
+              </a:rPr>
+              <a:t>Hệ thống máy tính của 3 nhà máy đang kết nối với nhau cũng như kết nối với mạng Internet bên ngoài( Google, Zalo, Outlook…) thông qua 3 đường mạng riêng biệt cung cấp bởi nhà mạng VNPT triển khai cho từng nhà máy.</a:t>
+            </a:r>
+          </a:p>
+        </p:txBody>
+      </p:sp>
+    </p:spTree>
+    <p:extLst>
+      <p:ext uri="{BB962C8B-B14F-4D97-AF65-F5344CB8AC3E}">
+        <p14:creationId xmlns:p14="http://schemas.microsoft.com/office/powerpoint/2010/main" val="1371432847"/>
+      </p:ext>
+    </p:extLst>
+  </p:cSld>
+  <p:clrMapOvr>
+    <a:masterClrMapping/>
+  </p:clrMapOvr>
+</p:sld>
+</file>
+
+<file path=ppt/slides/slide16.xml><?xml version="1.0" encoding="utf-8"?>
+<p:sld xmlns:a="http://schemas.openxmlformats.org/drawingml/2006/main" xmlns:r="http://schemas.openxmlformats.org/officeDocument/2006/relationships" xmlns:p="http://schemas.openxmlformats.org/presentationml/2006/main">
+  <p:cSld>
+    <p:spTree>
+      <p:nvGrpSpPr>
+        <p:cNvPr id="1" name=""/>
+        <p:cNvGrpSpPr/>
+        <p:nvPr/>
+      </p:nvGrpSpPr>
+      <p:grpSpPr>
+        <a:xfrm>
+          <a:off x="0" y="0"/>
+          <a:ext cx="0" cy="0"/>
+          <a:chOff x="0" y="0"/>
+          <a:chExt cx="0" cy="0"/>
+        </a:xfrm>
+      </p:grpSpPr>
+      <p:sp>
+        <p:nvSpPr>
           <p:cNvPr id="3" name="Slide Number Placeholder 2"/>
           <p:cNvSpPr>
             <a:spLocks noGrp="1"/>
@@ -6023,7 +6270,7 @@
             <a:fld id="{D2D8002D-B5B0-4BAC-B1F6-782DDCCE6D9C}" type="slidenum">
               <a:rPr kumimoji="1" lang="ja-JP" altLang="en-US" smtClean="0"/>
               <a:pPr/>
-              <a:t>15</a:t>
+              <a:t>16</a:t>
             </a:fld>
             <a:endParaRPr kumimoji="1" lang="ja-JP" altLang="en-US"/>
           </a:p>
@@ -7310,8 +7557,8 @@
         </p:nvSpPr>
         <p:spPr>
           <a:xfrm>
-            <a:off x="0" y="188640"/>
-            <a:ext cx="4860032" cy="504056"/>
+            <a:off x="0" y="225000"/>
+            <a:ext cx="5364088" cy="504056"/>
           </a:xfrm>
           <a:noFill/>
         </p:spPr>
@@ -7322,10 +7569,16 @@
           <a:lstStyle/>
           <a:p>
             <a:r>
-              <a:rPr lang="en-US" altLang="ja-JP" sz="2200">
+              <a:rPr lang="en-US" altLang="ja-JP" sz="2200" dirty="0" smtClean="0">
                 <a:latin typeface="+mn-lt"/>
               </a:rPr>
-              <a:t>MÔ HÌNH MẠNG THỰC TẾ CỦA CÔNG TY</a:t>
+              <a:t> THỰC TRẠNG MÔ HÌNH MẠNG </a:t>
+            </a:r>
+            <a:r>
+              <a:rPr lang="en-US" altLang="ja-JP" sz="2200" dirty="0">
+                <a:latin typeface="+mn-lt"/>
+              </a:rPr>
+              <a:t>CỦA CÔNG TY</a:t>
             </a:r>
             <a:endParaRPr kumimoji="1" lang="en-US" altLang="ja-JP" sz="2200" dirty="0">
               <a:latin typeface="+mn-lt"/>
@@ -7419,29 +7672,1310 @@
           <a:lstStyle/>
           <a:p>
             <a:r>
-              <a:rPr lang="en-US" sz="1100" b="1">
-                <a:latin typeface="Times New Roman" panose="02020603050405020304" pitchFamily="18" charset="0"/>
-                <a:cs typeface="Times New Roman" panose="02020603050405020304" pitchFamily="18" charset="0"/>
-              </a:rPr>
-              <a:t>Công ty Đông Dương đang sử dụng 3 đường mạng riêng biệt được cung cấp bởi nhà mạng VPNT cho hệ thống máy tính của 3 nhà máy với  mục đích chính:</a:t>
-            </a:r>
-          </a:p>
-          <a:p>
-            <a:r>
-              <a:rPr lang="en-US" sz="1100">
-                <a:latin typeface="Times New Roman" panose="02020603050405020304" pitchFamily="18" charset="0"/>
-                <a:cs typeface="Times New Roman" panose="02020603050405020304" pitchFamily="18" charset="0"/>
-              </a:rPr>
-              <a:t>1) Truy cập Internet để phục vụ công việc phòng ban cũng như trao đổi công việc với khách hàng….</a:t>
-            </a:r>
-          </a:p>
-          <a:p>
-            <a:r>
-              <a:rPr lang="en-US" sz="1100">
-                <a:latin typeface="Times New Roman" panose="02020603050405020304" pitchFamily="18" charset="0"/>
-                <a:cs typeface="Times New Roman" panose="02020603050405020304" pitchFamily="18" charset="0"/>
-              </a:rPr>
-              <a:t>2) Các máy tính có thể kết nối cũng như sử dụng được dữ liệu nội bộ, hệ thống quản lý sản xuất (DProS, DProS2), hệ thống quản lý nhân sự (HRM), hệ thống quản lý kho ……</a:t>
+              <a:rPr lang="en-US" sz="1100" b="1" dirty="0" err="1">
+                <a:latin typeface="Times New Roman" panose="02020603050405020304" pitchFamily="18" charset="0"/>
+                <a:cs typeface="Times New Roman" panose="02020603050405020304" pitchFamily="18" charset="0"/>
+              </a:rPr>
+              <a:t>Công</a:t>
+            </a:r>
+            <a:r>
+              <a:rPr lang="en-US" sz="1100" b="1" dirty="0">
+                <a:latin typeface="Times New Roman" panose="02020603050405020304" pitchFamily="18" charset="0"/>
+                <a:cs typeface="Times New Roman" panose="02020603050405020304" pitchFamily="18" charset="0"/>
+              </a:rPr>
+              <a:t> ty </a:t>
+            </a:r>
+            <a:r>
+              <a:rPr lang="en-US" sz="1100" b="1" dirty="0" err="1">
+                <a:latin typeface="Times New Roman" panose="02020603050405020304" pitchFamily="18" charset="0"/>
+                <a:cs typeface="Times New Roman" panose="02020603050405020304" pitchFamily="18" charset="0"/>
+              </a:rPr>
+              <a:t>Đông</a:t>
+            </a:r>
+            <a:r>
+              <a:rPr lang="en-US" sz="1100" b="1" dirty="0">
+                <a:latin typeface="Times New Roman" panose="02020603050405020304" pitchFamily="18" charset="0"/>
+                <a:cs typeface="Times New Roman" panose="02020603050405020304" pitchFamily="18" charset="0"/>
+              </a:rPr>
+              <a:t> </a:t>
+            </a:r>
+            <a:r>
+              <a:rPr lang="en-US" sz="1100" b="1" dirty="0" err="1" smtClean="0">
+                <a:latin typeface="Times New Roman" panose="02020603050405020304" pitchFamily="18" charset="0"/>
+                <a:cs typeface="Times New Roman" panose="02020603050405020304" pitchFamily="18" charset="0"/>
+              </a:rPr>
+              <a:t>Dương</a:t>
+            </a:r>
+            <a:r>
+              <a:rPr lang="en-US" sz="1100" b="1" dirty="0" smtClean="0">
+                <a:latin typeface="Times New Roman" panose="02020603050405020304" pitchFamily="18" charset="0"/>
+                <a:cs typeface="Times New Roman" panose="02020603050405020304" pitchFamily="18" charset="0"/>
+              </a:rPr>
+              <a:t> </a:t>
+            </a:r>
+            <a:r>
+              <a:rPr lang="en-US" sz="1100" b="1" dirty="0" err="1" smtClean="0">
+                <a:latin typeface="Times New Roman" panose="02020603050405020304" pitchFamily="18" charset="0"/>
+                <a:cs typeface="Times New Roman" panose="02020603050405020304" pitchFamily="18" charset="0"/>
+              </a:rPr>
+              <a:t>hiện</a:t>
+            </a:r>
+            <a:r>
+              <a:rPr lang="en-US" sz="1100" b="1" dirty="0" smtClean="0">
+                <a:latin typeface="Times New Roman" panose="02020603050405020304" pitchFamily="18" charset="0"/>
+                <a:cs typeface="Times New Roman" panose="02020603050405020304" pitchFamily="18" charset="0"/>
+              </a:rPr>
+              <a:t> </a:t>
+            </a:r>
+            <a:r>
+              <a:rPr lang="en-US" sz="1100" b="1" dirty="0" err="1" smtClean="0">
+                <a:latin typeface="Times New Roman" panose="02020603050405020304" pitchFamily="18" charset="0"/>
+                <a:cs typeface="Times New Roman" panose="02020603050405020304" pitchFamily="18" charset="0"/>
+              </a:rPr>
+              <a:t>đang</a:t>
+            </a:r>
+            <a:r>
+              <a:rPr lang="en-US" sz="1100" b="1" dirty="0" smtClean="0">
+                <a:latin typeface="Times New Roman" panose="02020603050405020304" pitchFamily="18" charset="0"/>
+                <a:cs typeface="Times New Roman" panose="02020603050405020304" pitchFamily="18" charset="0"/>
+              </a:rPr>
+              <a:t> </a:t>
+            </a:r>
+            <a:r>
+              <a:rPr lang="en-US" sz="1100" b="1" dirty="0" err="1" smtClean="0">
+                <a:latin typeface="Times New Roman" panose="02020603050405020304" pitchFamily="18" charset="0"/>
+                <a:cs typeface="Times New Roman" panose="02020603050405020304" pitchFamily="18" charset="0"/>
+              </a:rPr>
+              <a:t>có</a:t>
+            </a:r>
+            <a:r>
+              <a:rPr lang="en-US" sz="1100" b="1" dirty="0" smtClean="0">
+                <a:latin typeface="Times New Roman" panose="02020603050405020304" pitchFamily="18" charset="0"/>
+                <a:cs typeface="Times New Roman" panose="02020603050405020304" pitchFamily="18" charset="0"/>
+              </a:rPr>
+              <a:t> 3 </a:t>
+            </a:r>
+            <a:r>
+              <a:rPr lang="en-US" sz="1100" b="1" dirty="0" err="1" smtClean="0">
+                <a:latin typeface="Times New Roman" panose="02020603050405020304" pitchFamily="18" charset="0"/>
+                <a:cs typeface="Times New Roman" panose="02020603050405020304" pitchFamily="18" charset="0"/>
+              </a:rPr>
+              <a:t>nhà</a:t>
+            </a:r>
+            <a:r>
+              <a:rPr lang="en-US" sz="1100" b="1" dirty="0" smtClean="0">
+                <a:latin typeface="Times New Roman" panose="02020603050405020304" pitchFamily="18" charset="0"/>
+                <a:cs typeface="Times New Roman" panose="02020603050405020304" pitchFamily="18" charset="0"/>
+              </a:rPr>
+              <a:t> </a:t>
+            </a:r>
+            <a:r>
+              <a:rPr lang="en-US" sz="1100" b="1" dirty="0" err="1" smtClean="0">
+                <a:latin typeface="Times New Roman" panose="02020603050405020304" pitchFamily="18" charset="0"/>
+                <a:cs typeface="Times New Roman" panose="02020603050405020304" pitchFamily="18" charset="0"/>
+              </a:rPr>
+              <a:t>máy</a:t>
+            </a:r>
+            <a:r>
+              <a:rPr lang="en-US" sz="1100" b="1" dirty="0" smtClean="0">
+                <a:latin typeface="Times New Roman" panose="02020603050405020304" pitchFamily="18" charset="0"/>
+                <a:cs typeface="Times New Roman" panose="02020603050405020304" pitchFamily="18" charset="0"/>
+              </a:rPr>
+              <a:t>, </a:t>
+            </a:r>
+            <a:r>
+              <a:rPr lang="en-US" sz="1100" b="1" dirty="0" err="1" smtClean="0">
+                <a:latin typeface="Times New Roman" panose="02020603050405020304" pitchFamily="18" charset="0"/>
+                <a:cs typeface="Times New Roman" panose="02020603050405020304" pitchFamily="18" charset="0"/>
+              </a:rPr>
+              <a:t>mỗi</a:t>
+            </a:r>
+            <a:r>
+              <a:rPr lang="en-US" sz="1100" b="1" dirty="0" smtClean="0">
+                <a:latin typeface="Times New Roman" panose="02020603050405020304" pitchFamily="18" charset="0"/>
+                <a:cs typeface="Times New Roman" panose="02020603050405020304" pitchFamily="18" charset="0"/>
+              </a:rPr>
+              <a:t> </a:t>
+            </a:r>
+            <a:r>
+              <a:rPr lang="en-US" sz="1100" b="1" dirty="0" err="1" smtClean="0">
+                <a:latin typeface="Times New Roman" panose="02020603050405020304" pitchFamily="18" charset="0"/>
+                <a:cs typeface="Times New Roman" panose="02020603050405020304" pitchFamily="18" charset="0"/>
+              </a:rPr>
+              <a:t>nhà</a:t>
+            </a:r>
+            <a:r>
+              <a:rPr lang="en-US" sz="1100" b="1" dirty="0" smtClean="0">
+                <a:latin typeface="Times New Roman" panose="02020603050405020304" pitchFamily="18" charset="0"/>
+                <a:cs typeface="Times New Roman" panose="02020603050405020304" pitchFamily="18" charset="0"/>
+              </a:rPr>
+              <a:t> </a:t>
+            </a:r>
+            <a:r>
+              <a:rPr lang="en-US" sz="1100" b="1" dirty="0" err="1" smtClean="0">
+                <a:latin typeface="Times New Roman" panose="02020603050405020304" pitchFamily="18" charset="0"/>
+                <a:cs typeface="Times New Roman" panose="02020603050405020304" pitchFamily="18" charset="0"/>
+              </a:rPr>
+              <a:t>máy</a:t>
+            </a:r>
+            <a:r>
+              <a:rPr lang="en-US" sz="1100" b="1" dirty="0" smtClean="0">
+                <a:latin typeface="Times New Roman" panose="02020603050405020304" pitchFamily="18" charset="0"/>
+                <a:cs typeface="Times New Roman" panose="02020603050405020304" pitchFamily="18" charset="0"/>
+              </a:rPr>
+              <a:t> </a:t>
+            </a:r>
+            <a:r>
+              <a:rPr lang="en-US" sz="1100" b="1" dirty="0" err="1">
+                <a:latin typeface="Times New Roman" panose="02020603050405020304" pitchFamily="18" charset="0"/>
+                <a:cs typeface="Times New Roman" panose="02020603050405020304" pitchFamily="18" charset="0"/>
+              </a:rPr>
+              <a:t>sử</a:t>
+            </a:r>
+            <a:r>
+              <a:rPr lang="en-US" sz="1100" b="1" dirty="0">
+                <a:latin typeface="Times New Roman" panose="02020603050405020304" pitchFamily="18" charset="0"/>
+                <a:cs typeface="Times New Roman" panose="02020603050405020304" pitchFamily="18" charset="0"/>
+              </a:rPr>
+              <a:t> </a:t>
+            </a:r>
+            <a:r>
+              <a:rPr lang="en-US" sz="1100" b="1" dirty="0" err="1">
+                <a:latin typeface="Times New Roman" panose="02020603050405020304" pitchFamily="18" charset="0"/>
+                <a:cs typeface="Times New Roman" panose="02020603050405020304" pitchFamily="18" charset="0"/>
+              </a:rPr>
+              <a:t>dụng</a:t>
+            </a:r>
+            <a:r>
+              <a:rPr lang="en-US" sz="1100" b="1" dirty="0">
+                <a:latin typeface="Times New Roman" panose="02020603050405020304" pitchFamily="18" charset="0"/>
+                <a:cs typeface="Times New Roman" panose="02020603050405020304" pitchFamily="18" charset="0"/>
+              </a:rPr>
+              <a:t> </a:t>
+            </a:r>
+            <a:r>
+              <a:rPr lang="en-US" sz="1100" b="1" dirty="0" smtClean="0">
+                <a:latin typeface="Times New Roman" panose="02020603050405020304" pitchFamily="18" charset="0"/>
+                <a:cs typeface="Times New Roman" panose="02020603050405020304" pitchFamily="18" charset="0"/>
+              </a:rPr>
+              <a:t>1 </a:t>
+            </a:r>
+            <a:r>
+              <a:rPr lang="en-US" sz="1100" b="1" dirty="0" err="1">
+                <a:latin typeface="Times New Roman" panose="02020603050405020304" pitchFamily="18" charset="0"/>
+                <a:cs typeface="Times New Roman" panose="02020603050405020304" pitchFamily="18" charset="0"/>
+              </a:rPr>
+              <a:t>đường</a:t>
+            </a:r>
+            <a:r>
+              <a:rPr lang="en-US" sz="1100" b="1" dirty="0">
+                <a:latin typeface="Times New Roman" panose="02020603050405020304" pitchFamily="18" charset="0"/>
+                <a:cs typeface="Times New Roman" panose="02020603050405020304" pitchFamily="18" charset="0"/>
+              </a:rPr>
+              <a:t> </a:t>
+            </a:r>
+            <a:r>
+              <a:rPr lang="en-US" sz="1100" b="1" dirty="0" err="1">
+                <a:latin typeface="Times New Roman" panose="02020603050405020304" pitchFamily="18" charset="0"/>
+                <a:cs typeface="Times New Roman" panose="02020603050405020304" pitchFamily="18" charset="0"/>
+              </a:rPr>
+              <a:t>mạng</a:t>
+            </a:r>
+            <a:r>
+              <a:rPr lang="en-US" sz="1100" b="1" dirty="0">
+                <a:latin typeface="Times New Roman" panose="02020603050405020304" pitchFamily="18" charset="0"/>
+                <a:cs typeface="Times New Roman" panose="02020603050405020304" pitchFamily="18" charset="0"/>
+              </a:rPr>
+              <a:t> </a:t>
+            </a:r>
+            <a:r>
+              <a:rPr lang="en-US" sz="1100" b="1" dirty="0" err="1">
+                <a:latin typeface="Times New Roman" panose="02020603050405020304" pitchFamily="18" charset="0"/>
+                <a:cs typeface="Times New Roman" panose="02020603050405020304" pitchFamily="18" charset="0"/>
+              </a:rPr>
+              <a:t>riêng</a:t>
+            </a:r>
+            <a:r>
+              <a:rPr lang="en-US" sz="1100" b="1" dirty="0">
+                <a:latin typeface="Times New Roman" panose="02020603050405020304" pitchFamily="18" charset="0"/>
+                <a:cs typeface="Times New Roman" panose="02020603050405020304" pitchFamily="18" charset="0"/>
+              </a:rPr>
+              <a:t> </a:t>
+            </a:r>
+            <a:r>
+              <a:rPr lang="en-US" sz="1100" b="1" dirty="0" err="1">
+                <a:latin typeface="Times New Roman" panose="02020603050405020304" pitchFamily="18" charset="0"/>
+                <a:cs typeface="Times New Roman" panose="02020603050405020304" pitchFamily="18" charset="0"/>
+              </a:rPr>
+              <a:t>biệt</a:t>
+            </a:r>
+            <a:r>
+              <a:rPr lang="en-US" sz="1100" b="1" dirty="0">
+                <a:latin typeface="Times New Roman" panose="02020603050405020304" pitchFamily="18" charset="0"/>
+                <a:cs typeface="Times New Roman" panose="02020603050405020304" pitchFamily="18" charset="0"/>
+              </a:rPr>
+              <a:t> </a:t>
+            </a:r>
+            <a:r>
+              <a:rPr lang="en-US" sz="1100" b="1" dirty="0" err="1">
+                <a:latin typeface="Times New Roman" panose="02020603050405020304" pitchFamily="18" charset="0"/>
+                <a:cs typeface="Times New Roman" panose="02020603050405020304" pitchFamily="18" charset="0"/>
+              </a:rPr>
+              <a:t>được</a:t>
+            </a:r>
+            <a:r>
+              <a:rPr lang="en-US" sz="1100" b="1" dirty="0">
+                <a:latin typeface="Times New Roman" panose="02020603050405020304" pitchFamily="18" charset="0"/>
+                <a:cs typeface="Times New Roman" panose="02020603050405020304" pitchFamily="18" charset="0"/>
+              </a:rPr>
+              <a:t> </a:t>
+            </a:r>
+            <a:r>
+              <a:rPr lang="en-US" sz="1100" b="1" dirty="0" err="1">
+                <a:latin typeface="Times New Roman" panose="02020603050405020304" pitchFamily="18" charset="0"/>
+                <a:cs typeface="Times New Roman" panose="02020603050405020304" pitchFamily="18" charset="0"/>
+              </a:rPr>
+              <a:t>cung</a:t>
+            </a:r>
+            <a:r>
+              <a:rPr lang="en-US" sz="1100" b="1" dirty="0">
+                <a:latin typeface="Times New Roman" panose="02020603050405020304" pitchFamily="18" charset="0"/>
+                <a:cs typeface="Times New Roman" panose="02020603050405020304" pitchFamily="18" charset="0"/>
+              </a:rPr>
+              <a:t> </a:t>
+            </a:r>
+            <a:r>
+              <a:rPr lang="en-US" sz="1100" b="1" dirty="0" err="1">
+                <a:latin typeface="Times New Roman" panose="02020603050405020304" pitchFamily="18" charset="0"/>
+                <a:cs typeface="Times New Roman" panose="02020603050405020304" pitchFamily="18" charset="0"/>
+              </a:rPr>
+              <a:t>cấp</a:t>
+            </a:r>
+            <a:r>
+              <a:rPr lang="en-US" sz="1100" b="1" dirty="0">
+                <a:latin typeface="Times New Roman" panose="02020603050405020304" pitchFamily="18" charset="0"/>
+                <a:cs typeface="Times New Roman" panose="02020603050405020304" pitchFamily="18" charset="0"/>
+              </a:rPr>
+              <a:t> </a:t>
+            </a:r>
+            <a:r>
+              <a:rPr lang="en-US" sz="1100" b="1" dirty="0" err="1">
+                <a:latin typeface="Times New Roman" panose="02020603050405020304" pitchFamily="18" charset="0"/>
+                <a:cs typeface="Times New Roman" panose="02020603050405020304" pitchFamily="18" charset="0"/>
+              </a:rPr>
+              <a:t>bởi</a:t>
+            </a:r>
+            <a:r>
+              <a:rPr lang="en-US" sz="1100" b="1" dirty="0">
+                <a:latin typeface="Times New Roman" panose="02020603050405020304" pitchFamily="18" charset="0"/>
+                <a:cs typeface="Times New Roman" panose="02020603050405020304" pitchFamily="18" charset="0"/>
+              </a:rPr>
+              <a:t> </a:t>
+            </a:r>
+            <a:r>
+              <a:rPr lang="en-US" sz="1100" b="1" dirty="0" err="1">
+                <a:latin typeface="Times New Roman" panose="02020603050405020304" pitchFamily="18" charset="0"/>
+                <a:cs typeface="Times New Roman" panose="02020603050405020304" pitchFamily="18" charset="0"/>
+              </a:rPr>
+              <a:t>nhà</a:t>
+            </a:r>
+            <a:r>
+              <a:rPr lang="en-US" sz="1100" b="1" dirty="0">
+                <a:latin typeface="Times New Roman" panose="02020603050405020304" pitchFamily="18" charset="0"/>
+                <a:cs typeface="Times New Roman" panose="02020603050405020304" pitchFamily="18" charset="0"/>
+              </a:rPr>
+              <a:t> </a:t>
+            </a:r>
+            <a:r>
+              <a:rPr lang="en-US" sz="1100" b="1" dirty="0" err="1">
+                <a:latin typeface="Times New Roman" panose="02020603050405020304" pitchFamily="18" charset="0"/>
+                <a:cs typeface="Times New Roman" panose="02020603050405020304" pitchFamily="18" charset="0"/>
+              </a:rPr>
+              <a:t>mạng</a:t>
+            </a:r>
+            <a:r>
+              <a:rPr lang="en-US" sz="1100" b="1" dirty="0">
+                <a:latin typeface="Times New Roman" panose="02020603050405020304" pitchFamily="18" charset="0"/>
+                <a:cs typeface="Times New Roman" panose="02020603050405020304" pitchFamily="18" charset="0"/>
+              </a:rPr>
+              <a:t> VPNT </a:t>
+            </a:r>
+            <a:r>
+              <a:rPr lang="en-US" sz="1100" b="1" dirty="0" err="1">
+                <a:latin typeface="Times New Roman" panose="02020603050405020304" pitchFamily="18" charset="0"/>
+                <a:cs typeface="Times New Roman" panose="02020603050405020304" pitchFamily="18" charset="0"/>
+              </a:rPr>
+              <a:t>cho</a:t>
+            </a:r>
+            <a:r>
+              <a:rPr lang="en-US" sz="1100" b="1" dirty="0">
+                <a:latin typeface="Times New Roman" panose="02020603050405020304" pitchFamily="18" charset="0"/>
+                <a:cs typeface="Times New Roman" panose="02020603050405020304" pitchFamily="18" charset="0"/>
+              </a:rPr>
+              <a:t> </a:t>
+            </a:r>
+            <a:r>
+              <a:rPr lang="en-US" sz="1100" b="1" dirty="0" err="1">
+                <a:latin typeface="Times New Roman" panose="02020603050405020304" pitchFamily="18" charset="0"/>
+                <a:cs typeface="Times New Roman" panose="02020603050405020304" pitchFamily="18" charset="0"/>
+              </a:rPr>
+              <a:t>hệ</a:t>
+            </a:r>
+            <a:r>
+              <a:rPr lang="en-US" sz="1100" b="1" dirty="0">
+                <a:latin typeface="Times New Roman" panose="02020603050405020304" pitchFamily="18" charset="0"/>
+                <a:cs typeface="Times New Roman" panose="02020603050405020304" pitchFamily="18" charset="0"/>
+              </a:rPr>
+              <a:t> </a:t>
+            </a:r>
+            <a:r>
+              <a:rPr lang="en-US" sz="1100" b="1" dirty="0" err="1">
+                <a:latin typeface="Times New Roman" panose="02020603050405020304" pitchFamily="18" charset="0"/>
+                <a:cs typeface="Times New Roman" panose="02020603050405020304" pitchFamily="18" charset="0"/>
+              </a:rPr>
+              <a:t>thống</a:t>
+            </a:r>
+            <a:r>
+              <a:rPr lang="en-US" sz="1100" b="1" dirty="0">
+                <a:latin typeface="Times New Roman" panose="02020603050405020304" pitchFamily="18" charset="0"/>
+                <a:cs typeface="Times New Roman" panose="02020603050405020304" pitchFamily="18" charset="0"/>
+              </a:rPr>
+              <a:t> </a:t>
+            </a:r>
+            <a:r>
+              <a:rPr lang="en-US" sz="1100" b="1" dirty="0" err="1">
+                <a:latin typeface="Times New Roman" panose="02020603050405020304" pitchFamily="18" charset="0"/>
+                <a:cs typeface="Times New Roman" panose="02020603050405020304" pitchFamily="18" charset="0"/>
+              </a:rPr>
+              <a:t>máy</a:t>
+            </a:r>
+            <a:r>
+              <a:rPr lang="en-US" sz="1100" b="1" dirty="0">
+                <a:latin typeface="Times New Roman" panose="02020603050405020304" pitchFamily="18" charset="0"/>
+                <a:cs typeface="Times New Roman" panose="02020603050405020304" pitchFamily="18" charset="0"/>
+              </a:rPr>
+              <a:t> </a:t>
+            </a:r>
+            <a:r>
+              <a:rPr lang="en-US" sz="1100" b="1" dirty="0" err="1">
+                <a:latin typeface="Times New Roman" panose="02020603050405020304" pitchFamily="18" charset="0"/>
+                <a:cs typeface="Times New Roman" panose="02020603050405020304" pitchFamily="18" charset="0"/>
+              </a:rPr>
+              <a:t>tính</a:t>
+            </a:r>
+            <a:r>
+              <a:rPr lang="en-US" sz="1100" b="1" dirty="0">
+                <a:latin typeface="Times New Roman" panose="02020603050405020304" pitchFamily="18" charset="0"/>
+                <a:cs typeface="Times New Roman" panose="02020603050405020304" pitchFamily="18" charset="0"/>
+              </a:rPr>
+              <a:t> </a:t>
+            </a:r>
+            <a:r>
+              <a:rPr lang="en-US" sz="1100" b="1" dirty="0" err="1" smtClean="0">
+                <a:latin typeface="Times New Roman" panose="02020603050405020304" pitchFamily="18" charset="0"/>
+                <a:cs typeface="Times New Roman" panose="02020603050405020304" pitchFamily="18" charset="0"/>
+              </a:rPr>
+              <a:t>với</a:t>
+            </a:r>
+            <a:r>
+              <a:rPr lang="en-US" sz="1100" b="1" dirty="0" smtClean="0">
+                <a:latin typeface="Times New Roman" panose="02020603050405020304" pitchFamily="18" charset="0"/>
+                <a:cs typeface="Times New Roman" panose="02020603050405020304" pitchFamily="18" charset="0"/>
+              </a:rPr>
+              <a:t>  </a:t>
+            </a:r>
+            <a:r>
+              <a:rPr lang="en-US" sz="1100" b="1" dirty="0" err="1">
+                <a:latin typeface="Times New Roman" panose="02020603050405020304" pitchFamily="18" charset="0"/>
+                <a:cs typeface="Times New Roman" panose="02020603050405020304" pitchFamily="18" charset="0"/>
+              </a:rPr>
+              <a:t>mục</a:t>
+            </a:r>
+            <a:r>
+              <a:rPr lang="en-US" sz="1100" b="1" dirty="0">
+                <a:latin typeface="Times New Roman" panose="02020603050405020304" pitchFamily="18" charset="0"/>
+                <a:cs typeface="Times New Roman" panose="02020603050405020304" pitchFamily="18" charset="0"/>
+              </a:rPr>
+              <a:t> </a:t>
+            </a:r>
+            <a:r>
+              <a:rPr lang="en-US" sz="1100" b="1" dirty="0" err="1">
+                <a:latin typeface="Times New Roman" panose="02020603050405020304" pitchFamily="18" charset="0"/>
+                <a:cs typeface="Times New Roman" panose="02020603050405020304" pitchFamily="18" charset="0"/>
+              </a:rPr>
+              <a:t>đích</a:t>
+            </a:r>
+            <a:r>
+              <a:rPr lang="en-US" sz="1100" b="1" dirty="0">
+                <a:latin typeface="Times New Roman" panose="02020603050405020304" pitchFamily="18" charset="0"/>
+                <a:cs typeface="Times New Roman" panose="02020603050405020304" pitchFamily="18" charset="0"/>
+              </a:rPr>
+              <a:t> </a:t>
+            </a:r>
+            <a:r>
+              <a:rPr lang="en-US" sz="1100" b="1" dirty="0" err="1">
+                <a:latin typeface="Times New Roman" panose="02020603050405020304" pitchFamily="18" charset="0"/>
+                <a:cs typeface="Times New Roman" panose="02020603050405020304" pitchFamily="18" charset="0"/>
+              </a:rPr>
+              <a:t>chính</a:t>
+            </a:r>
+            <a:r>
+              <a:rPr lang="en-US" sz="1100" b="1" dirty="0">
+                <a:latin typeface="Times New Roman" panose="02020603050405020304" pitchFamily="18" charset="0"/>
+                <a:cs typeface="Times New Roman" panose="02020603050405020304" pitchFamily="18" charset="0"/>
+              </a:rPr>
+              <a:t>:</a:t>
+            </a:r>
+          </a:p>
+          <a:p>
+            <a:r>
+              <a:rPr lang="en-US" sz="1100" dirty="0" smtClean="0">
+                <a:latin typeface="Times New Roman" panose="02020603050405020304" pitchFamily="18" charset="0"/>
+                <a:cs typeface="Times New Roman" panose="02020603050405020304" pitchFamily="18" charset="0"/>
+              </a:rPr>
+              <a:t>1)</a:t>
+            </a:r>
+            <a:r>
+              <a:rPr lang="en-US" sz="1100" dirty="0" err="1" smtClean="0">
+                <a:latin typeface="Times New Roman" panose="02020603050405020304" pitchFamily="18" charset="0"/>
+                <a:cs typeface="Times New Roman" panose="02020603050405020304" pitchFamily="18" charset="0"/>
+              </a:rPr>
+              <a:t>Máy</a:t>
+            </a:r>
+            <a:r>
+              <a:rPr lang="en-US" sz="1100" dirty="0" smtClean="0">
+                <a:latin typeface="Times New Roman" panose="02020603050405020304" pitchFamily="18" charset="0"/>
+                <a:cs typeface="Times New Roman" panose="02020603050405020304" pitchFamily="18" charset="0"/>
+              </a:rPr>
+              <a:t> </a:t>
+            </a:r>
+            <a:r>
+              <a:rPr lang="en-US" sz="1100" dirty="0" err="1" smtClean="0">
+                <a:latin typeface="Times New Roman" panose="02020603050405020304" pitchFamily="18" charset="0"/>
+                <a:cs typeface="Times New Roman" panose="02020603050405020304" pitchFamily="18" charset="0"/>
+              </a:rPr>
+              <a:t>tính</a:t>
+            </a:r>
+            <a:r>
+              <a:rPr lang="en-US" sz="1100" dirty="0" smtClean="0">
+                <a:latin typeface="Times New Roman" panose="02020603050405020304" pitchFamily="18" charset="0"/>
+                <a:cs typeface="Times New Roman" panose="02020603050405020304" pitchFamily="18" charset="0"/>
+              </a:rPr>
+              <a:t> </a:t>
+            </a:r>
+            <a:r>
+              <a:rPr lang="en-US" sz="1100" dirty="0" err="1" smtClean="0">
+                <a:latin typeface="Times New Roman" panose="02020603050405020304" pitchFamily="18" charset="0"/>
+                <a:cs typeface="Times New Roman" panose="02020603050405020304" pitchFamily="18" charset="0"/>
+              </a:rPr>
+              <a:t>của</a:t>
+            </a:r>
+            <a:r>
+              <a:rPr lang="en-US" sz="1100" dirty="0" smtClean="0">
+                <a:latin typeface="Times New Roman" panose="02020603050405020304" pitchFamily="18" charset="0"/>
+                <a:cs typeface="Times New Roman" panose="02020603050405020304" pitchFamily="18" charset="0"/>
+              </a:rPr>
+              <a:t> </a:t>
+            </a:r>
+            <a:r>
+              <a:rPr lang="en-US" sz="1100" dirty="0" err="1" smtClean="0">
+                <a:latin typeface="Times New Roman" panose="02020603050405020304" pitchFamily="18" charset="0"/>
+                <a:cs typeface="Times New Roman" panose="02020603050405020304" pitchFamily="18" charset="0"/>
+              </a:rPr>
+              <a:t>từng</a:t>
+            </a:r>
+            <a:r>
+              <a:rPr lang="en-US" sz="1100" dirty="0" smtClean="0">
+                <a:latin typeface="Times New Roman" panose="02020603050405020304" pitchFamily="18" charset="0"/>
+                <a:cs typeface="Times New Roman" panose="02020603050405020304" pitchFamily="18" charset="0"/>
+              </a:rPr>
+              <a:t> </a:t>
+            </a:r>
+            <a:r>
+              <a:rPr lang="en-US" sz="1100" dirty="0" err="1" smtClean="0">
+                <a:latin typeface="Times New Roman" panose="02020603050405020304" pitchFamily="18" charset="0"/>
+                <a:cs typeface="Times New Roman" panose="02020603050405020304" pitchFamily="18" charset="0"/>
+              </a:rPr>
+              <a:t>nhà</a:t>
+            </a:r>
+            <a:r>
+              <a:rPr lang="en-US" sz="1100" dirty="0" smtClean="0">
+                <a:latin typeface="Times New Roman" panose="02020603050405020304" pitchFamily="18" charset="0"/>
+                <a:cs typeface="Times New Roman" panose="02020603050405020304" pitchFamily="18" charset="0"/>
+              </a:rPr>
+              <a:t> </a:t>
+            </a:r>
+            <a:r>
+              <a:rPr lang="en-US" sz="1100" dirty="0" err="1" smtClean="0">
+                <a:latin typeface="Times New Roman" panose="02020603050405020304" pitchFamily="18" charset="0"/>
+                <a:cs typeface="Times New Roman" panose="02020603050405020304" pitchFamily="18" charset="0"/>
+              </a:rPr>
+              <a:t>máy</a:t>
+            </a:r>
+            <a:r>
+              <a:rPr lang="en-US" sz="1100" dirty="0" smtClean="0">
+                <a:latin typeface="Times New Roman" panose="02020603050405020304" pitchFamily="18" charset="0"/>
+                <a:cs typeface="Times New Roman" panose="02020603050405020304" pitchFamily="18" charset="0"/>
+              </a:rPr>
+              <a:t> </a:t>
+            </a:r>
+            <a:r>
+              <a:rPr lang="en-US" sz="1100" dirty="0" err="1" smtClean="0">
+                <a:latin typeface="Times New Roman" panose="02020603050405020304" pitchFamily="18" charset="0"/>
+                <a:cs typeface="Times New Roman" panose="02020603050405020304" pitchFamily="18" charset="0"/>
+              </a:rPr>
+              <a:t>có</a:t>
+            </a:r>
+            <a:r>
+              <a:rPr lang="en-US" sz="1100" dirty="0" smtClean="0">
+                <a:latin typeface="Times New Roman" panose="02020603050405020304" pitchFamily="18" charset="0"/>
+                <a:cs typeface="Times New Roman" panose="02020603050405020304" pitchFamily="18" charset="0"/>
+              </a:rPr>
+              <a:t> </a:t>
+            </a:r>
+            <a:r>
+              <a:rPr lang="en-US" sz="1100" dirty="0" err="1" smtClean="0">
+                <a:latin typeface="Times New Roman" panose="02020603050405020304" pitchFamily="18" charset="0"/>
+                <a:cs typeface="Times New Roman" panose="02020603050405020304" pitchFamily="18" charset="0"/>
+              </a:rPr>
+              <a:t>thể</a:t>
+            </a:r>
+            <a:r>
+              <a:rPr lang="en-US" sz="1100" dirty="0" smtClean="0">
+                <a:latin typeface="Times New Roman" panose="02020603050405020304" pitchFamily="18" charset="0"/>
+                <a:cs typeface="Times New Roman" panose="02020603050405020304" pitchFamily="18" charset="0"/>
+              </a:rPr>
+              <a:t> </a:t>
+            </a:r>
+            <a:r>
+              <a:rPr lang="en-US" sz="1100" dirty="0" err="1">
+                <a:latin typeface="Times New Roman" panose="02020603050405020304" pitchFamily="18" charset="0"/>
+                <a:cs typeface="Times New Roman" panose="02020603050405020304" pitchFamily="18" charset="0"/>
+              </a:rPr>
+              <a:t>t</a:t>
+            </a:r>
+            <a:r>
+              <a:rPr lang="en-US" sz="1100" dirty="0" err="1" smtClean="0">
+                <a:latin typeface="Times New Roman" panose="02020603050405020304" pitchFamily="18" charset="0"/>
+                <a:cs typeface="Times New Roman" panose="02020603050405020304" pitchFamily="18" charset="0"/>
+              </a:rPr>
+              <a:t>ruy</a:t>
+            </a:r>
+            <a:r>
+              <a:rPr lang="en-US" sz="1100" dirty="0" smtClean="0">
+                <a:latin typeface="Times New Roman" panose="02020603050405020304" pitchFamily="18" charset="0"/>
+                <a:cs typeface="Times New Roman" panose="02020603050405020304" pitchFamily="18" charset="0"/>
+              </a:rPr>
+              <a:t> </a:t>
+            </a:r>
+            <a:r>
+              <a:rPr lang="en-US" sz="1100" dirty="0" err="1">
+                <a:latin typeface="Times New Roman" panose="02020603050405020304" pitchFamily="18" charset="0"/>
+                <a:cs typeface="Times New Roman" panose="02020603050405020304" pitchFamily="18" charset="0"/>
+              </a:rPr>
+              <a:t>cập</a:t>
+            </a:r>
+            <a:r>
+              <a:rPr lang="en-US" sz="1100" dirty="0">
+                <a:latin typeface="Times New Roman" panose="02020603050405020304" pitchFamily="18" charset="0"/>
+                <a:cs typeface="Times New Roman" panose="02020603050405020304" pitchFamily="18" charset="0"/>
+              </a:rPr>
+              <a:t> Internet </a:t>
+            </a:r>
+            <a:r>
+              <a:rPr lang="en-US" sz="1100" dirty="0" err="1">
+                <a:latin typeface="Times New Roman" panose="02020603050405020304" pitchFamily="18" charset="0"/>
+                <a:cs typeface="Times New Roman" panose="02020603050405020304" pitchFamily="18" charset="0"/>
+              </a:rPr>
+              <a:t>để</a:t>
+            </a:r>
+            <a:r>
+              <a:rPr lang="en-US" sz="1100" dirty="0">
+                <a:latin typeface="Times New Roman" panose="02020603050405020304" pitchFamily="18" charset="0"/>
+                <a:cs typeface="Times New Roman" panose="02020603050405020304" pitchFamily="18" charset="0"/>
+              </a:rPr>
+              <a:t> </a:t>
+            </a:r>
+            <a:r>
+              <a:rPr lang="en-US" sz="1100" dirty="0" err="1">
+                <a:latin typeface="Times New Roman" panose="02020603050405020304" pitchFamily="18" charset="0"/>
+                <a:cs typeface="Times New Roman" panose="02020603050405020304" pitchFamily="18" charset="0"/>
+              </a:rPr>
+              <a:t>phục</a:t>
+            </a:r>
+            <a:r>
+              <a:rPr lang="en-US" sz="1100" dirty="0">
+                <a:latin typeface="Times New Roman" panose="02020603050405020304" pitchFamily="18" charset="0"/>
+                <a:cs typeface="Times New Roman" panose="02020603050405020304" pitchFamily="18" charset="0"/>
+              </a:rPr>
+              <a:t> </a:t>
+            </a:r>
+            <a:r>
+              <a:rPr lang="en-US" sz="1100" dirty="0" err="1">
+                <a:latin typeface="Times New Roman" panose="02020603050405020304" pitchFamily="18" charset="0"/>
+                <a:cs typeface="Times New Roman" panose="02020603050405020304" pitchFamily="18" charset="0"/>
+              </a:rPr>
+              <a:t>vụ</a:t>
+            </a:r>
+            <a:r>
+              <a:rPr lang="en-US" sz="1100" dirty="0">
+                <a:latin typeface="Times New Roman" panose="02020603050405020304" pitchFamily="18" charset="0"/>
+                <a:cs typeface="Times New Roman" panose="02020603050405020304" pitchFamily="18" charset="0"/>
+              </a:rPr>
+              <a:t> </a:t>
+            </a:r>
+            <a:r>
+              <a:rPr lang="en-US" sz="1100" dirty="0" err="1">
+                <a:latin typeface="Times New Roman" panose="02020603050405020304" pitchFamily="18" charset="0"/>
+                <a:cs typeface="Times New Roman" panose="02020603050405020304" pitchFamily="18" charset="0"/>
+              </a:rPr>
+              <a:t>công</a:t>
+            </a:r>
+            <a:r>
+              <a:rPr lang="en-US" sz="1100" dirty="0">
+                <a:latin typeface="Times New Roman" panose="02020603050405020304" pitchFamily="18" charset="0"/>
+                <a:cs typeface="Times New Roman" panose="02020603050405020304" pitchFamily="18" charset="0"/>
+              </a:rPr>
+              <a:t> </a:t>
+            </a:r>
+            <a:r>
+              <a:rPr lang="en-US" sz="1100" dirty="0" err="1">
+                <a:latin typeface="Times New Roman" panose="02020603050405020304" pitchFamily="18" charset="0"/>
+                <a:cs typeface="Times New Roman" panose="02020603050405020304" pitchFamily="18" charset="0"/>
+              </a:rPr>
+              <a:t>việc</a:t>
+            </a:r>
+            <a:r>
+              <a:rPr lang="en-US" sz="1100" dirty="0">
+                <a:latin typeface="Times New Roman" panose="02020603050405020304" pitchFamily="18" charset="0"/>
+                <a:cs typeface="Times New Roman" panose="02020603050405020304" pitchFamily="18" charset="0"/>
+              </a:rPr>
+              <a:t> </a:t>
+            </a:r>
+            <a:r>
+              <a:rPr lang="en-US" sz="1100" dirty="0" err="1">
+                <a:latin typeface="Times New Roman" panose="02020603050405020304" pitchFamily="18" charset="0"/>
+                <a:cs typeface="Times New Roman" panose="02020603050405020304" pitchFamily="18" charset="0"/>
+              </a:rPr>
+              <a:t>phòng</a:t>
+            </a:r>
+            <a:r>
+              <a:rPr lang="en-US" sz="1100" dirty="0">
+                <a:latin typeface="Times New Roman" panose="02020603050405020304" pitchFamily="18" charset="0"/>
+                <a:cs typeface="Times New Roman" panose="02020603050405020304" pitchFamily="18" charset="0"/>
+              </a:rPr>
+              <a:t> ban </a:t>
+            </a:r>
+            <a:r>
+              <a:rPr lang="en-US" sz="1100" dirty="0" err="1">
+                <a:latin typeface="Times New Roman" panose="02020603050405020304" pitchFamily="18" charset="0"/>
+                <a:cs typeface="Times New Roman" panose="02020603050405020304" pitchFamily="18" charset="0"/>
+              </a:rPr>
+              <a:t>cũng</a:t>
+            </a:r>
+            <a:r>
+              <a:rPr lang="en-US" sz="1100" dirty="0">
+                <a:latin typeface="Times New Roman" panose="02020603050405020304" pitchFamily="18" charset="0"/>
+                <a:cs typeface="Times New Roman" panose="02020603050405020304" pitchFamily="18" charset="0"/>
+              </a:rPr>
+              <a:t> </a:t>
+            </a:r>
+            <a:r>
+              <a:rPr lang="en-US" sz="1100" dirty="0" err="1">
+                <a:latin typeface="Times New Roman" panose="02020603050405020304" pitchFamily="18" charset="0"/>
+                <a:cs typeface="Times New Roman" panose="02020603050405020304" pitchFamily="18" charset="0"/>
+              </a:rPr>
+              <a:t>như</a:t>
+            </a:r>
+            <a:r>
+              <a:rPr lang="en-US" sz="1100" dirty="0">
+                <a:latin typeface="Times New Roman" panose="02020603050405020304" pitchFamily="18" charset="0"/>
+                <a:cs typeface="Times New Roman" panose="02020603050405020304" pitchFamily="18" charset="0"/>
+              </a:rPr>
+              <a:t> </a:t>
+            </a:r>
+            <a:r>
+              <a:rPr lang="en-US" sz="1100" dirty="0" err="1">
+                <a:latin typeface="Times New Roman" panose="02020603050405020304" pitchFamily="18" charset="0"/>
+                <a:cs typeface="Times New Roman" panose="02020603050405020304" pitchFamily="18" charset="0"/>
+              </a:rPr>
+              <a:t>trao</a:t>
+            </a:r>
+            <a:r>
+              <a:rPr lang="en-US" sz="1100" dirty="0">
+                <a:latin typeface="Times New Roman" panose="02020603050405020304" pitchFamily="18" charset="0"/>
+                <a:cs typeface="Times New Roman" panose="02020603050405020304" pitchFamily="18" charset="0"/>
+              </a:rPr>
+              <a:t> </a:t>
+            </a:r>
+            <a:r>
+              <a:rPr lang="en-US" sz="1100" dirty="0" err="1">
+                <a:latin typeface="Times New Roman" panose="02020603050405020304" pitchFamily="18" charset="0"/>
+                <a:cs typeface="Times New Roman" panose="02020603050405020304" pitchFamily="18" charset="0"/>
+              </a:rPr>
+              <a:t>đổi</a:t>
+            </a:r>
+            <a:r>
+              <a:rPr lang="en-US" sz="1100" dirty="0">
+                <a:latin typeface="Times New Roman" panose="02020603050405020304" pitchFamily="18" charset="0"/>
+                <a:cs typeface="Times New Roman" panose="02020603050405020304" pitchFamily="18" charset="0"/>
+              </a:rPr>
+              <a:t> </a:t>
+            </a:r>
+            <a:r>
+              <a:rPr lang="en-US" sz="1100" dirty="0" err="1">
+                <a:latin typeface="Times New Roman" panose="02020603050405020304" pitchFamily="18" charset="0"/>
+                <a:cs typeface="Times New Roman" panose="02020603050405020304" pitchFamily="18" charset="0"/>
+              </a:rPr>
+              <a:t>công</a:t>
+            </a:r>
+            <a:r>
+              <a:rPr lang="en-US" sz="1100" dirty="0">
+                <a:latin typeface="Times New Roman" panose="02020603050405020304" pitchFamily="18" charset="0"/>
+                <a:cs typeface="Times New Roman" panose="02020603050405020304" pitchFamily="18" charset="0"/>
+              </a:rPr>
+              <a:t> </a:t>
+            </a:r>
+            <a:r>
+              <a:rPr lang="en-US" sz="1100" dirty="0" err="1">
+                <a:latin typeface="Times New Roman" panose="02020603050405020304" pitchFamily="18" charset="0"/>
+                <a:cs typeface="Times New Roman" panose="02020603050405020304" pitchFamily="18" charset="0"/>
+              </a:rPr>
+              <a:t>việc</a:t>
+            </a:r>
+            <a:r>
+              <a:rPr lang="en-US" sz="1100" dirty="0">
+                <a:latin typeface="Times New Roman" panose="02020603050405020304" pitchFamily="18" charset="0"/>
+                <a:cs typeface="Times New Roman" panose="02020603050405020304" pitchFamily="18" charset="0"/>
+              </a:rPr>
+              <a:t> </a:t>
+            </a:r>
+            <a:r>
+              <a:rPr lang="en-US" sz="1100" dirty="0" err="1">
+                <a:latin typeface="Times New Roman" panose="02020603050405020304" pitchFamily="18" charset="0"/>
+                <a:cs typeface="Times New Roman" panose="02020603050405020304" pitchFamily="18" charset="0"/>
+              </a:rPr>
+              <a:t>với</a:t>
+            </a:r>
+            <a:r>
+              <a:rPr lang="en-US" sz="1100" dirty="0">
+                <a:latin typeface="Times New Roman" panose="02020603050405020304" pitchFamily="18" charset="0"/>
+                <a:cs typeface="Times New Roman" panose="02020603050405020304" pitchFamily="18" charset="0"/>
+              </a:rPr>
+              <a:t> </a:t>
+            </a:r>
+            <a:r>
+              <a:rPr lang="en-US" sz="1100" dirty="0" err="1">
+                <a:latin typeface="Times New Roman" panose="02020603050405020304" pitchFamily="18" charset="0"/>
+                <a:cs typeface="Times New Roman" panose="02020603050405020304" pitchFamily="18" charset="0"/>
+              </a:rPr>
+              <a:t>khách</a:t>
+            </a:r>
+            <a:r>
+              <a:rPr lang="en-US" sz="1100" dirty="0">
+                <a:latin typeface="Times New Roman" panose="02020603050405020304" pitchFamily="18" charset="0"/>
+                <a:cs typeface="Times New Roman" panose="02020603050405020304" pitchFamily="18" charset="0"/>
+              </a:rPr>
+              <a:t> </a:t>
+            </a:r>
+            <a:r>
+              <a:rPr lang="en-US" sz="1100" dirty="0" err="1">
+                <a:latin typeface="Times New Roman" panose="02020603050405020304" pitchFamily="18" charset="0"/>
+                <a:cs typeface="Times New Roman" panose="02020603050405020304" pitchFamily="18" charset="0"/>
+              </a:rPr>
+              <a:t>hàng</a:t>
+            </a:r>
+            <a:r>
+              <a:rPr lang="en-US" sz="1100" dirty="0">
+                <a:latin typeface="Times New Roman" panose="02020603050405020304" pitchFamily="18" charset="0"/>
+                <a:cs typeface="Times New Roman" panose="02020603050405020304" pitchFamily="18" charset="0"/>
+              </a:rPr>
+              <a:t>….</a:t>
+            </a:r>
+          </a:p>
+          <a:p>
+            <a:r>
+              <a:rPr lang="en-US" sz="1100" dirty="0">
+                <a:latin typeface="Times New Roman" panose="02020603050405020304" pitchFamily="18" charset="0"/>
+                <a:cs typeface="Times New Roman" panose="02020603050405020304" pitchFamily="18" charset="0"/>
+              </a:rPr>
+              <a:t>2) </a:t>
+            </a:r>
+            <a:r>
+              <a:rPr lang="en-US" sz="1100" dirty="0" err="1">
+                <a:latin typeface="Times New Roman" panose="02020603050405020304" pitchFamily="18" charset="0"/>
+                <a:cs typeface="Times New Roman" panose="02020603050405020304" pitchFamily="18" charset="0"/>
+              </a:rPr>
+              <a:t>Các</a:t>
+            </a:r>
+            <a:r>
+              <a:rPr lang="en-US" sz="1100" dirty="0">
+                <a:latin typeface="Times New Roman" panose="02020603050405020304" pitchFamily="18" charset="0"/>
+                <a:cs typeface="Times New Roman" panose="02020603050405020304" pitchFamily="18" charset="0"/>
+              </a:rPr>
+              <a:t> </a:t>
+            </a:r>
+            <a:r>
+              <a:rPr lang="en-US" sz="1100" dirty="0" err="1">
+                <a:latin typeface="Times New Roman" panose="02020603050405020304" pitchFamily="18" charset="0"/>
+                <a:cs typeface="Times New Roman" panose="02020603050405020304" pitchFamily="18" charset="0"/>
+              </a:rPr>
+              <a:t>máy</a:t>
+            </a:r>
+            <a:r>
+              <a:rPr lang="en-US" sz="1100" dirty="0">
+                <a:latin typeface="Times New Roman" panose="02020603050405020304" pitchFamily="18" charset="0"/>
+                <a:cs typeface="Times New Roman" panose="02020603050405020304" pitchFamily="18" charset="0"/>
+              </a:rPr>
+              <a:t> </a:t>
+            </a:r>
+            <a:r>
+              <a:rPr lang="en-US" sz="1100" dirty="0" err="1">
+                <a:latin typeface="Times New Roman" panose="02020603050405020304" pitchFamily="18" charset="0"/>
+                <a:cs typeface="Times New Roman" panose="02020603050405020304" pitchFamily="18" charset="0"/>
+              </a:rPr>
+              <a:t>tính</a:t>
+            </a:r>
+            <a:r>
+              <a:rPr lang="en-US" sz="1100" dirty="0">
+                <a:latin typeface="Times New Roman" panose="02020603050405020304" pitchFamily="18" charset="0"/>
+                <a:cs typeface="Times New Roman" panose="02020603050405020304" pitchFamily="18" charset="0"/>
+              </a:rPr>
+              <a:t> </a:t>
+            </a:r>
+            <a:r>
+              <a:rPr lang="en-US" sz="1100" dirty="0" err="1">
+                <a:latin typeface="Times New Roman" panose="02020603050405020304" pitchFamily="18" charset="0"/>
+                <a:cs typeface="Times New Roman" panose="02020603050405020304" pitchFamily="18" charset="0"/>
+              </a:rPr>
+              <a:t>có</a:t>
+            </a:r>
+            <a:r>
+              <a:rPr lang="en-US" sz="1100" dirty="0">
+                <a:latin typeface="Times New Roman" panose="02020603050405020304" pitchFamily="18" charset="0"/>
+                <a:cs typeface="Times New Roman" panose="02020603050405020304" pitchFamily="18" charset="0"/>
+              </a:rPr>
+              <a:t> </a:t>
+            </a:r>
+            <a:r>
+              <a:rPr lang="en-US" sz="1100" dirty="0" err="1">
+                <a:latin typeface="Times New Roman" panose="02020603050405020304" pitchFamily="18" charset="0"/>
+                <a:cs typeface="Times New Roman" panose="02020603050405020304" pitchFamily="18" charset="0"/>
+              </a:rPr>
+              <a:t>thể</a:t>
+            </a:r>
+            <a:r>
+              <a:rPr lang="en-US" sz="1100" dirty="0">
+                <a:latin typeface="Times New Roman" panose="02020603050405020304" pitchFamily="18" charset="0"/>
+                <a:cs typeface="Times New Roman" panose="02020603050405020304" pitchFamily="18" charset="0"/>
+              </a:rPr>
+              <a:t> </a:t>
+            </a:r>
+            <a:r>
+              <a:rPr lang="en-US" sz="1100" dirty="0" err="1">
+                <a:latin typeface="Times New Roman" panose="02020603050405020304" pitchFamily="18" charset="0"/>
+                <a:cs typeface="Times New Roman" panose="02020603050405020304" pitchFamily="18" charset="0"/>
+              </a:rPr>
+              <a:t>kết</a:t>
+            </a:r>
+            <a:r>
+              <a:rPr lang="en-US" sz="1100" dirty="0">
+                <a:latin typeface="Times New Roman" panose="02020603050405020304" pitchFamily="18" charset="0"/>
+                <a:cs typeface="Times New Roman" panose="02020603050405020304" pitchFamily="18" charset="0"/>
+              </a:rPr>
+              <a:t> </a:t>
+            </a:r>
+            <a:r>
+              <a:rPr lang="en-US" sz="1100" dirty="0" err="1">
+                <a:latin typeface="Times New Roman" panose="02020603050405020304" pitchFamily="18" charset="0"/>
+                <a:cs typeface="Times New Roman" panose="02020603050405020304" pitchFamily="18" charset="0"/>
+              </a:rPr>
+              <a:t>nối</a:t>
+            </a:r>
+            <a:r>
+              <a:rPr lang="en-US" sz="1100" dirty="0">
+                <a:latin typeface="Times New Roman" panose="02020603050405020304" pitchFamily="18" charset="0"/>
+                <a:cs typeface="Times New Roman" panose="02020603050405020304" pitchFamily="18" charset="0"/>
+              </a:rPr>
+              <a:t> </a:t>
+            </a:r>
+            <a:r>
+              <a:rPr lang="en-US" sz="1100" dirty="0" err="1">
+                <a:latin typeface="Times New Roman" panose="02020603050405020304" pitchFamily="18" charset="0"/>
+                <a:cs typeface="Times New Roman" panose="02020603050405020304" pitchFamily="18" charset="0"/>
+              </a:rPr>
+              <a:t>cũng</a:t>
+            </a:r>
+            <a:r>
+              <a:rPr lang="en-US" sz="1100" dirty="0">
+                <a:latin typeface="Times New Roman" panose="02020603050405020304" pitchFamily="18" charset="0"/>
+                <a:cs typeface="Times New Roman" panose="02020603050405020304" pitchFamily="18" charset="0"/>
+              </a:rPr>
+              <a:t> </a:t>
+            </a:r>
+            <a:r>
+              <a:rPr lang="en-US" sz="1100" dirty="0" err="1">
+                <a:latin typeface="Times New Roman" panose="02020603050405020304" pitchFamily="18" charset="0"/>
+                <a:cs typeface="Times New Roman" panose="02020603050405020304" pitchFamily="18" charset="0"/>
+              </a:rPr>
+              <a:t>như</a:t>
+            </a:r>
+            <a:r>
+              <a:rPr lang="en-US" sz="1100" dirty="0">
+                <a:latin typeface="Times New Roman" panose="02020603050405020304" pitchFamily="18" charset="0"/>
+                <a:cs typeface="Times New Roman" panose="02020603050405020304" pitchFamily="18" charset="0"/>
+              </a:rPr>
+              <a:t> </a:t>
+            </a:r>
+            <a:r>
+              <a:rPr lang="en-US" sz="1100" dirty="0" err="1">
+                <a:latin typeface="Times New Roman" panose="02020603050405020304" pitchFamily="18" charset="0"/>
+                <a:cs typeface="Times New Roman" panose="02020603050405020304" pitchFamily="18" charset="0"/>
+              </a:rPr>
+              <a:t>sử</a:t>
+            </a:r>
+            <a:r>
+              <a:rPr lang="en-US" sz="1100" dirty="0">
+                <a:latin typeface="Times New Roman" panose="02020603050405020304" pitchFamily="18" charset="0"/>
+                <a:cs typeface="Times New Roman" panose="02020603050405020304" pitchFamily="18" charset="0"/>
+              </a:rPr>
+              <a:t> </a:t>
+            </a:r>
+            <a:r>
+              <a:rPr lang="en-US" sz="1100" dirty="0" err="1">
+                <a:latin typeface="Times New Roman" panose="02020603050405020304" pitchFamily="18" charset="0"/>
+                <a:cs typeface="Times New Roman" panose="02020603050405020304" pitchFamily="18" charset="0"/>
+              </a:rPr>
+              <a:t>dụng</a:t>
+            </a:r>
+            <a:r>
+              <a:rPr lang="en-US" sz="1100" dirty="0">
+                <a:latin typeface="Times New Roman" panose="02020603050405020304" pitchFamily="18" charset="0"/>
+                <a:cs typeface="Times New Roman" panose="02020603050405020304" pitchFamily="18" charset="0"/>
+              </a:rPr>
+              <a:t> </a:t>
+            </a:r>
+            <a:r>
+              <a:rPr lang="en-US" sz="1100" dirty="0" err="1">
+                <a:latin typeface="Times New Roman" panose="02020603050405020304" pitchFamily="18" charset="0"/>
+                <a:cs typeface="Times New Roman" panose="02020603050405020304" pitchFamily="18" charset="0"/>
+              </a:rPr>
+              <a:t>được</a:t>
+            </a:r>
+            <a:r>
+              <a:rPr lang="en-US" sz="1100" dirty="0">
+                <a:latin typeface="Times New Roman" panose="02020603050405020304" pitchFamily="18" charset="0"/>
+                <a:cs typeface="Times New Roman" panose="02020603050405020304" pitchFamily="18" charset="0"/>
+              </a:rPr>
+              <a:t> </a:t>
+            </a:r>
+            <a:r>
+              <a:rPr lang="en-US" sz="1100" dirty="0" err="1">
+                <a:latin typeface="Times New Roman" panose="02020603050405020304" pitchFamily="18" charset="0"/>
+                <a:cs typeface="Times New Roman" panose="02020603050405020304" pitchFamily="18" charset="0"/>
+              </a:rPr>
+              <a:t>dữ</a:t>
+            </a:r>
+            <a:r>
+              <a:rPr lang="en-US" sz="1100" dirty="0">
+                <a:latin typeface="Times New Roman" panose="02020603050405020304" pitchFamily="18" charset="0"/>
+                <a:cs typeface="Times New Roman" panose="02020603050405020304" pitchFamily="18" charset="0"/>
+              </a:rPr>
+              <a:t> </a:t>
+            </a:r>
+            <a:r>
+              <a:rPr lang="en-US" sz="1100" dirty="0" err="1">
+                <a:latin typeface="Times New Roman" panose="02020603050405020304" pitchFamily="18" charset="0"/>
+                <a:cs typeface="Times New Roman" panose="02020603050405020304" pitchFamily="18" charset="0"/>
+              </a:rPr>
+              <a:t>liệu</a:t>
+            </a:r>
+            <a:r>
+              <a:rPr lang="en-US" sz="1100" dirty="0">
+                <a:latin typeface="Times New Roman" panose="02020603050405020304" pitchFamily="18" charset="0"/>
+                <a:cs typeface="Times New Roman" panose="02020603050405020304" pitchFamily="18" charset="0"/>
+              </a:rPr>
+              <a:t> </a:t>
+            </a:r>
+            <a:r>
+              <a:rPr lang="en-US" sz="1100" dirty="0" err="1">
+                <a:latin typeface="Times New Roman" panose="02020603050405020304" pitchFamily="18" charset="0"/>
+                <a:cs typeface="Times New Roman" panose="02020603050405020304" pitchFamily="18" charset="0"/>
+              </a:rPr>
+              <a:t>nội</a:t>
+            </a:r>
+            <a:r>
+              <a:rPr lang="en-US" sz="1100" dirty="0">
+                <a:latin typeface="Times New Roman" panose="02020603050405020304" pitchFamily="18" charset="0"/>
+                <a:cs typeface="Times New Roman" panose="02020603050405020304" pitchFamily="18" charset="0"/>
+              </a:rPr>
+              <a:t> </a:t>
+            </a:r>
+            <a:r>
+              <a:rPr lang="en-US" sz="1100" dirty="0" err="1">
+                <a:latin typeface="Times New Roman" panose="02020603050405020304" pitchFamily="18" charset="0"/>
+                <a:cs typeface="Times New Roman" panose="02020603050405020304" pitchFamily="18" charset="0"/>
+              </a:rPr>
+              <a:t>bộ</a:t>
+            </a:r>
+            <a:r>
+              <a:rPr lang="en-US" sz="1100" dirty="0">
+                <a:latin typeface="Times New Roman" panose="02020603050405020304" pitchFamily="18" charset="0"/>
+                <a:cs typeface="Times New Roman" panose="02020603050405020304" pitchFamily="18" charset="0"/>
+              </a:rPr>
+              <a:t>, </a:t>
+            </a:r>
+            <a:r>
+              <a:rPr lang="en-US" sz="1100" dirty="0" err="1">
+                <a:latin typeface="Times New Roman" panose="02020603050405020304" pitchFamily="18" charset="0"/>
+                <a:cs typeface="Times New Roman" panose="02020603050405020304" pitchFamily="18" charset="0"/>
+              </a:rPr>
+              <a:t>hệ</a:t>
+            </a:r>
+            <a:r>
+              <a:rPr lang="en-US" sz="1100" dirty="0">
+                <a:latin typeface="Times New Roman" panose="02020603050405020304" pitchFamily="18" charset="0"/>
+                <a:cs typeface="Times New Roman" panose="02020603050405020304" pitchFamily="18" charset="0"/>
+              </a:rPr>
+              <a:t> </a:t>
+            </a:r>
+            <a:r>
+              <a:rPr lang="en-US" sz="1100" dirty="0" err="1">
+                <a:latin typeface="Times New Roman" panose="02020603050405020304" pitchFamily="18" charset="0"/>
+                <a:cs typeface="Times New Roman" panose="02020603050405020304" pitchFamily="18" charset="0"/>
+              </a:rPr>
+              <a:t>thống</a:t>
+            </a:r>
+            <a:r>
+              <a:rPr lang="en-US" sz="1100" dirty="0">
+                <a:latin typeface="Times New Roman" panose="02020603050405020304" pitchFamily="18" charset="0"/>
+                <a:cs typeface="Times New Roman" panose="02020603050405020304" pitchFamily="18" charset="0"/>
+              </a:rPr>
+              <a:t> </a:t>
+            </a:r>
+            <a:r>
+              <a:rPr lang="en-US" sz="1100" dirty="0" err="1">
+                <a:latin typeface="Times New Roman" panose="02020603050405020304" pitchFamily="18" charset="0"/>
+                <a:cs typeface="Times New Roman" panose="02020603050405020304" pitchFamily="18" charset="0"/>
+              </a:rPr>
+              <a:t>quản</a:t>
+            </a:r>
+            <a:r>
+              <a:rPr lang="en-US" sz="1100" dirty="0">
+                <a:latin typeface="Times New Roman" panose="02020603050405020304" pitchFamily="18" charset="0"/>
+                <a:cs typeface="Times New Roman" panose="02020603050405020304" pitchFamily="18" charset="0"/>
+              </a:rPr>
+              <a:t> </a:t>
+            </a:r>
+            <a:r>
+              <a:rPr lang="en-US" sz="1100" dirty="0" err="1">
+                <a:latin typeface="Times New Roman" panose="02020603050405020304" pitchFamily="18" charset="0"/>
+                <a:cs typeface="Times New Roman" panose="02020603050405020304" pitchFamily="18" charset="0"/>
+              </a:rPr>
+              <a:t>lý</a:t>
+            </a:r>
+            <a:r>
+              <a:rPr lang="en-US" sz="1100" dirty="0">
+                <a:latin typeface="Times New Roman" panose="02020603050405020304" pitchFamily="18" charset="0"/>
+                <a:cs typeface="Times New Roman" panose="02020603050405020304" pitchFamily="18" charset="0"/>
+              </a:rPr>
+              <a:t> </a:t>
+            </a:r>
+            <a:r>
+              <a:rPr lang="en-US" sz="1100" dirty="0" err="1">
+                <a:latin typeface="Times New Roman" panose="02020603050405020304" pitchFamily="18" charset="0"/>
+                <a:cs typeface="Times New Roman" panose="02020603050405020304" pitchFamily="18" charset="0"/>
+              </a:rPr>
+              <a:t>sản</a:t>
+            </a:r>
+            <a:r>
+              <a:rPr lang="en-US" sz="1100" dirty="0">
+                <a:latin typeface="Times New Roman" panose="02020603050405020304" pitchFamily="18" charset="0"/>
+                <a:cs typeface="Times New Roman" panose="02020603050405020304" pitchFamily="18" charset="0"/>
+              </a:rPr>
+              <a:t> </a:t>
+            </a:r>
+            <a:r>
+              <a:rPr lang="en-US" sz="1100" dirty="0" err="1">
+                <a:latin typeface="Times New Roman" panose="02020603050405020304" pitchFamily="18" charset="0"/>
+                <a:cs typeface="Times New Roman" panose="02020603050405020304" pitchFamily="18" charset="0"/>
+              </a:rPr>
+              <a:t>xuất</a:t>
+            </a:r>
+            <a:r>
+              <a:rPr lang="en-US" sz="1100" dirty="0">
+                <a:latin typeface="Times New Roman" panose="02020603050405020304" pitchFamily="18" charset="0"/>
+                <a:cs typeface="Times New Roman" panose="02020603050405020304" pitchFamily="18" charset="0"/>
+              </a:rPr>
+              <a:t> (</a:t>
+            </a:r>
+            <a:r>
+              <a:rPr lang="en-US" sz="1100" dirty="0" err="1">
+                <a:latin typeface="Times New Roman" panose="02020603050405020304" pitchFamily="18" charset="0"/>
+                <a:cs typeface="Times New Roman" panose="02020603050405020304" pitchFamily="18" charset="0"/>
+              </a:rPr>
+              <a:t>DProS</a:t>
+            </a:r>
+            <a:r>
+              <a:rPr lang="en-US" sz="1100" dirty="0">
+                <a:latin typeface="Times New Roman" panose="02020603050405020304" pitchFamily="18" charset="0"/>
+                <a:cs typeface="Times New Roman" panose="02020603050405020304" pitchFamily="18" charset="0"/>
+              </a:rPr>
+              <a:t>, DProS2), </a:t>
+            </a:r>
+            <a:r>
+              <a:rPr lang="en-US" sz="1100" dirty="0" err="1">
+                <a:latin typeface="Times New Roman" panose="02020603050405020304" pitchFamily="18" charset="0"/>
+                <a:cs typeface="Times New Roman" panose="02020603050405020304" pitchFamily="18" charset="0"/>
+              </a:rPr>
+              <a:t>hệ</a:t>
+            </a:r>
+            <a:r>
+              <a:rPr lang="en-US" sz="1100" dirty="0">
+                <a:latin typeface="Times New Roman" panose="02020603050405020304" pitchFamily="18" charset="0"/>
+                <a:cs typeface="Times New Roman" panose="02020603050405020304" pitchFamily="18" charset="0"/>
+              </a:rPr>
+              <a:t> </a:t>
+            </a:r>
+            <a:r>
+              <a:rPr lang="en-US" sz="1100" dirty="0" err="1">
+                <a:latin typeface="Times New Roman" panose="02020603050405020304" pitchFamily="18" charset="0"/>
+                <a:cs typeface="Times New Roman" panose="02020603050405020304" pitchFamily="18" charset="0"/>
+              </a:rPr>
+              <a:t>thống</a:t>
+            </a:r>
+            <a:r>
+              <a:rPr lang="en-US" sz="1100" dirty="0">
+                <a:latin typeface="Times New Roman" panose="02020603050405020304" pitchFamily="18" charset="0"/>
+                <a:cs typeface="Times New Roman" panose="02020603050405020304" pitchFamily="18" charset="0"/>
+              </a:rPr>
+              <a:t> </a:t>
+            </a:r>
+            <a:r>
+              <a:rPr lang="en-US" sz="1100" dirty="0" err="1">
+                <a:latin typeface="Times New Roman" panose="02020603050405020304" pitchFamily="18" charset="0"/>
+                <a:cs typeface="Times New Roman" panose="02020603050405020304" pitchFamily="18" charset="0"/>
+              </a:rPr>
+              <a:t>quản</a:t>
+            </a:r>
+            <a:r>
+              <a:rPr lang="en-US" sz="1100" dirty="0">
+                <a:latin typeface="Times New Roman" panose="02020603050405020304" pitchFamily="18" charset="0"/>
+                <a:cs typeface="Times New Roman" panose="02020603050405020304" pitchFamily="18" charset="0"/>
+              </a:rPr>
+              <a:t> </a:t>
+            </a:r>
+            <a:r>
+              <a:rPr lang="en-US" sz="1100" dirty="0" err="1">
+                <a:latin typeface="Times New Roman" panose="02020603050405020304" pitchFamily="18" charset="0"/>
+                <a:cs typeface="Times New Roman" panose="02020603050405020304" pitchFamily="18" charset="0"/>
+              </a:rPr>
+              <a:t>lý</a:t>
+            </a:r>
+            <a:r>
+              <a:rPr lang="en-US" sz="1100" dirty="0">
+                <a:latin typeface="Times New Roman" panose="02020603050405020304" pitchFamily="18" charset="0"/>
+                <a:cs typeface="Times New Roman" panose="02020603050405020304" pitchFamily="18" charset="0"/>
+              </a:rPr>
+              <a:t> </a:t>
+            </a:r>
+            <a:r>
+              <a:rPr lang="en-US" sz="1100" dirty="0" err="1">
+                <a:latin typeface="Times New Roman" panose="02020603050405020304" pitchFamily="18" charset="0"/>
+                <a:cs typeface="Times New Roman" panose="02020603050405020304" pitchFamily="18" charset="0"/>
+              </a:rPr>
+              <a:t>nhân</a:t>
+            </a:r>
+            <a:r>
+              <a:rPr lang="en-US" sz="1100" dirty="0">
+                <a:latin typeface="Times New Roman" panose="02020603050405020304" pitchFamily="18" charset="0"/>
+                <a:cs typeface="Times New Roman" panose="02020603050405020304" pitchFamily="18" charset="0"/>
+              </a:rPr>
+              <a:t> </a:t>
+            </a:r>
+            <a:r>
+              <a:rPr lang="en-US" sz="1100" dirty="0" err="1">
+                <a:latin typeface="Times New Roman" panose="02020603050405020304" pitchFamily="18" charset="0"/>
+                <a:cs typeface="Times New Roman" panose="02020603050405020304" pitchFamily="18" charset="0"/>
+              </a:rPr>
+              <a:t>sự</a:t>
+            </a:r>
+            <a:r>
+              <a:rPr lang="en-US" sz="1100" dirty="0">
+                <a:latin typeface="Times New Roman" panose="02020603050405020304" pitchFamily="18" charset="0"/>
+                <a:cs typeface="Times New Roman" panose="02020603050405020304" pitchFamily="18" charset="0"/>
+              </a:rPr>
+              <a:t> (HRM), </a:t>
+            </a:r>
+            <a:r>
+              <a:rPr lang="en-US" sz="1100" dirty="0" err="1">
+                <a:latin typeface="Times New Roman" panose="02020603050405020304" pitchFamily="18" charset="0"/>
+                <a:cs typeface="Times New Roman" panose="02020603050405020304" pitchFamily="18" charset="0"/>
+              </a:rPr>
+              <a:t>hệ</a:t>
+            </a:r>
+            <a:r>
+              <a:rPr lang="en-US" sz="1100" dirty="0">
+                <a:latin typeface="Times New Roman" panose="02020603050405020304" pitchFamily="18" charset="0"/>
+                <a:cs typeface="Times New Roman" panose="02020603050405020304" pitchFamily="18" charset="0"/>
+              </a:rPr>
+              <a:t> </a:t>
+            </a:r>
+            <a:r>
+              <a:rPr lang="en-US" sz="1100" dirty="0" err="1">
+                <a:latin typeface="Times New Roman" panose="02020603050405020304" pitchFamily="18" charset="0"/>
+                <a:cs typeface="Times New Roman" panose="02020603050405020304" pitchFamily="18" charset="0"/>
+              </a:rPr>
+              <a:t>thống</a:t>
+            </a:r>
+            <a:r>
+              <a:rPr lang="en-US" sz="1100" dirty="0">
+                <a:latin typeface="Times New Roman" panose="02020603050405020304" pitchFamily="18" charset="0"/>
+                <a:cs typeface="Times New Roman" panose="02020603050405020304" pitchFamily="18" charset="0"/>
+              </a:rPr>
+              <a:t> </a:t>
+            </a:r>
+            <a:r>
+              <a:rPr lang="en-US" sz="1100" dirty="0" err="1">
+                <a:latin typeface="Times New Roman" panose="02020603050405020304" pitchFamily="18" charset="0"/>
+                <a:cs typeface="Times New Roman" panose="02020603050405020304" pitchFamily="18" charset="0"/>
+              </a:rPr>
+              <a:t>quản</a:t>
+            </a:r>
+            <a:r>
+              <a:rPr lang="en-US" sz="1100" dirty="0">
+                <a:latin typeface="Times New Roman" panose="02020603050405020304" pitchFamily="18" charset="0"/>
+                <a:cs typeface="Times New Roman" panose="02020603050405020304" pitchFamily="18" charset="0"/>
+              </a:rPr>
+              <a:t> </a:t>
+            </a:r>
+            <a:r>
+              <a:rPr lang="en-US" sz="1100" dirty="0" err="1">
+                <a:latin typeface="Times New Roman" panose="02020603050405020304" pitchFamily="18" charset="0"/>
+                <a:cs typeface="Times New Roman" panose="02020603050405020304" pitchFamily="18" charset="0"/>
+              </a:rPr>
+              <a:t>lý</a:t>
+            </a:r>
+            <a:r>
+              <a:rPr lang="en-US" sz="1100" dirty="0">
+                <a:latin typeface="Times New Roman" panose="02020603050405020304" pitchFamily="18" charset="0"/>
+                <a:cs typeface="Times New Roman" panose="02020603050405020304" pitchFamily="18" charset="0"/>
+              </a:rPr>
+              <a:t> </a:t>
+            </a:r>
+            <a:r>
+              <a:rPr lang="en-US" sz="1100" dirty="0" err="1">
+                <a:latin typeface="Times New Roman" panose="02020603050405020304" pitchFamily="18" charset="0"/>
+                <a:cs typeface="Times New Roman" panose="02020603050405020304" pitchFamily="18" charset="0"/>
+              </a:rPr>
+              <a:t>kho</a:t>
+            </a:r>
+            <a:r>
+              <a:rPr lang="en-US" sz="1100" dirty="0">
+                <a:latin typeface="Times New Roman" panose="02020603050405020304" pitchFamily="18" charset="0"/>
+                <a:cs typeface="Times New Roman" panose="02020603050405020304" pitchFamily="18" charset="0"/>
+              </a:rPr>
+              <a:t> ……</a:t>
             </a:r>
           </a:p>
         </p:txBody>
@@ -7689,6 +9223,36 @@
           </a:prstGeom>
         </p:spPr>
       </p:pic>
+      <p:pic>
+        <p:nvPicPr>
+          <p:cNvPr id="13" name="Picture 12">
+            <a:extLst>
+              <a:ext uri="{FF2B5EF4-FFF2-40B4-BE49-F238E27FC236}">
+                <a16:creationId xmlns:a16="http://schemas.microsoft.com/office/drawing/2014/main" id="{59D5079A-DFEF-B63C-CE79-9CCEB61F2371}"/>
+              </a:ext>
+            </a:extLst>
+          </p:cNvPr>
+          <p:cNvPicPr>
+            <a:picLocks noChangeAspect="1"/>
+          </p:cNvPicPr>
+          <p:nvPr/>
+        </p:nvPicPr>
+        <p:blipFill>
+          <a:blip r:embed="rId7"/>
+          <a:stretch>
+            <a:fillRect/>
+          </a:stretch>
+        </p:blipFill>
+        <p:spPr>
+          <a:xfrm>
+            <a:off x="755576" y="1806825"/>
+            <a:ext cx="432048" cy="532346"/>
+          </a:xfrm>
+          <a:prstGeom prst="rect">
+            <a:avLst/>
+          </a:prstGeom>
+        </p:spPr>
+      </p:pic>
     </p:spTree>
     <p:extLst>
       <p:ext uri="{BB962C8B-B14F-4D97-AF65-F5344CB8AC3E}">
@@ -7731,8 +9295,8 @@
         </p:nvSpPr>
         <p:spPr>
           <a:xfrm>
-            <a:off x="0" y="188640"/>
-            <a:ext cx="4860032" cy="504056"/>
+            <a:off x="0" y="225000"/>
+            <a:ext cx="6156176" cy="504056"/>
           </a:xfrm>
           <a:noFill/>
         </p:spPr>
@@ -7743,10 +9307,22 @@
           <a:lstStyle/>
           <a:p>
             <a:r>
-              <a:rPr lang="en-US" altLang="ja-JP" sz="2200">
+              <a:rPr lang="en-US" altLang="ja-JP" sz="2200" dirty="0" smtClean="0">
                 <a:latin typeface="+mn-lt"/>
               </a:rPr>
-              <a:t>MÔ HÌNH MẠNG THỰC TẾ CỦA CÔNG TY</a:t>
+              <a:t>SỰ CỐ ĐÃ GẶP PHẢI</a:t>
+            </a:r>
+            <a:r>
+              <a:rPr lang="en-US" altLang="ja-JP" sz="2200" dirty="0" smtClean="0">
+                <a:latin typeface="+mn-lt"/>
+              </a:rPr>
+              <a:t> MÔ HÌNH MẠNG </a:t>
+            </a:r>
+            <a:r>
+              <a:rPr lang="en-US" altLang="ja-JP" sz="2200" dirty="0">
+                <a:latin typeface="+mn-lt"/>
+              </a:rPr>
+              <a:t>CỦA CÔNG TY</a:t>
             </a:r>
             <a:endParaRPr kumimoji="1" lang="en-US" altLang="ja-JP" sz="2200" dirty="0">
               <a:latin typeface="+mn-lt"/>
@@ -7803,186 +9379,921 @@
         </p:blipFill>
         <p:spPr>
           <a:xfrm>
-            <a:off x="471339" y="1307449"/>
-            <a:ext cx="5832648" cy="3551108"/>
+            <a:off x="593376" y="1058528"/>
+            <a:ext cx="6840760" cy="4164879"/>
           </a:xfrm>
           <a:prstGeom prst="rect">
             <a:avLst/>
           </a:prstGeom>
         </p:spPr>
       </p:pic>
-      <p:sp>
-        <p:nvSpPr>
-          <p:cNvPr id="3" name="TextBox 2">
+      <p:pic>
+        <p:nvPicPr>
+          <p:cNvPr id="11" name="Picture 10">
             <a:extLst>
               <a:ext uri="{FF2B5EF4-FFF2-40B4-BE49-F238E27FC236}">
-                <a16:creationId xmlns:a16="http://schemas.microsoft.com/office/drawing/2014/main" id="{AB8A9502-D629-5EE6-2395-D1818F6873D4}"/>
+                <a16:creationId xmlns:a16="http://schemas.microsoft.com/office/drawing/2014/main" id="{A81FD7BD-FD4F-88E5-7CF5-229710B57159}"/>
               </a:ext>
             </a:extLst>
           </p:cNvPr>
-          <p:cNvSpPr txBox="1"/>
+          <p:cNvPicPr>
+            <a:picLocks noChangeAspect="1"/>
+          </p:cNvPicPr>
           <p:nvPr/>
-        </p:nvSpPr>
-        <p:spPr>
-          <a:xfrm>
-            <a:off x="204714" y="911612"/>
-            <a:ext cx="8687766" cy="338554"/>
+        </p:nvPicPr>
+        <p:blipFill>
+          <a:blip r:embed="rId4"/>
+          <a:stretch>
+            <a:fillRect/>
+          </a:stretch>
+        </p:blipFill>
+        <p:spPr>
+          <a:xfrm>
+            <a:off x="7337913" y="2852262"/>
+            <a:ext cx="1672695" cy="519588"/>
           </a:xfrm>
           <a:prstGeom prst="rect">
             <a:avLst/>
           </a:prstGeom>
-          <a:noFill/>
-        </p:spPr>
-        <p:txBody>
-          <a:bodyPr wrap="square" rtlCol="0">
-            <a:spAutoFit/>
-          </a:bodyPr>
-          <a:lstStyle/>
-          <a:p>
-            <a:r>
-              <a:rPr lang="en-US" sz="1600" b="1">
-                <a:latin typeface="Times New Roman" panose="02020603050405020304" pitchFamily="18" charset="0"/>
-                <a:cs typeface="Times New Roman" panose="02020603050405020304" pitchFamily="18" charset="0"/>
-              </a:rPr>
-              <a:t>1) Truy cập Internet để phục vụ công việc phòng ban cũng như trao đổi công việc với khách hàng</a:t>
-            </a:r>
-          </a:p>
-        </p:txBody>
-      </p:sp>
-      <p:sp>
-        <p:nvSpPr>
-          <p:cNvPr id="5" name="TextBox 4">
+        </p:spPr>
+      </p:pic>
+      <p:cxnSp>
+        <p:nvCxnSpPr>
+          <p:cNvPr id="14" name="Straight Arrow Connector 13">
             <a:extLst>
               <a:ext uri="{FF2B5EF4-FFF2-40B4-BE49-F238E27FC236}">
-                <a16:creationId xmlns:a16="http://schemas.microsoft.com/office/drawing/2014/main" id="{7F6CEBD1-28EB-ACD8-EF7D-5930D5AAFD99}"/>
+                <a16:creationId xmlns:a16="http://schemas.microsoft.com/office/drawing/2014/main" id="{221B7A09-B922-0822-D59B-580C38982CA4}"/>
               </a:ext>
             </a:extLst>
           </p:cNvPr>
-          <p:cNvSpPr txBox="1"/>
+          <p:cNvCxnSpPr>
+            <a:cxnSpLocks/>
+          </p:cNvCxnSpPr>
           <p:nvPr/>
-        </p:nvSpPr>
-        <p:spPr>
-          <a:xfrm>
-            <a:off x="323528" y="4977554"/>
-            <a:ext cx="8568952" cy="1169551"/>
-          </a:xfrm>
-          <a:prstGeom prst="rect">
-            <a:avLst/>
-          </a:prstGeom>
-          <a:noFill/>
-        </p:spPr>
-        <p:txBody>
-          <a:bodyPr wrap="square" rtlCol="0">
-            <a:spAutoFit/>
-          </a:bodyPr>
-          <a:lstStyle/>
-          <a:p>
-            <a:pPr marL="285750" indent="-285750">
-              <a:buFontTx/>
-              <a:buChar char="-"/>
-            </a:pPr>
-            <a:r>
-              <a:rPr lang="en-US" sz="1400">
-                <a:latin typeface="Times New Roman" panose="02020603050405020304" pitchFamily="18" charset="0"/>
-                <a:cs typeface="Times New Roman" panose="02020603050405020304" pitchFamily="18" charset="0"/>
-              </a:rPr>
-              <a:t>CNV sử dụng Mail Outlook để trao đổi công việc nội bộ công ty hoặc là liên lạc công việc với đối tác, khách hàng (3 nhà máy).</a:t>
-            </a:r>
-          </a:p>
-          <a:p>
-            <a:pPr marL="285750" indent="-285750">
-              <a:buFontTx/>
-              <a:buChar char="-"/>
-            </a:pPr>
-            <a:r>
-              <a:rPr lang="en-US" sz="1400">
-                <a:latin typeface="Times New Roman" panose="02020603050405020304" pitchFamily="18" charset="0"/>
-                <a:cs typeface="Times New Roman" panose="02020603050405020304" pitchFamily="18" charset="0"/>
-              </a:rPr>
-              <a:t>Nhóm Hải Quan cần sử dụng mạng Internet để truy cập hệ thống hải quan để khai báo thủ tục, giấy tờ liên quan. </a:t>
-            </a:r>
-          </a:p>
-          <a:p>
-            <a:pPr marL="285750" indent="-285750">
-              <a:buFontTx/>
-              <a:buChar char="-"/>
-            </a:pPr>
-            <a:r>
-              <a:rPr lang="en-US" sz="1400">
-                <a:latin typeface="Times New Roman" panose="02020603050405020304" pitchFamily="18" charset="0"/>
-                <a:cs typeface="Times New Roman" panose="02020603050405020304" pitchFamily="18" charset="0"/>
-              </a:rPr>
-              <a:t>Nhóm Marketing truy cập Internet để quản lý Fanpage công ty trên Facebook…..</a:t>
-            </a:r>
-          </a:p>
-          <a:p>
-            <a:pPr marL="285750" indent="-285750">
-              <a:buFontTx/>
-              <a:buChar char="-"/>
-            </a:pPr>
-            <a:r>
-              <a:rPr lang="en-US" sz="1400">
-                <a:latin typeface="Times New Roman" panose="02020603050405020304" pitchFamily="18" charset="0"/>
-                <a:cs typeface="Times New Roman" panose="02020603050405020304" pitchFamily="18" charset="0"/>
-              </a:rPr>
-              <a:t>Nhóm QC truy cập trang Web của Brother để cập nhật dữ liệu của khách hàng….</a:t>
-            </a:r>
-          </a:p>
-        </p:txBody>
-      </p:sp>
-      <p:sp>
-        <p:nvSpPr>
-          <p:cNvPr id="6" name="TextBox 5">
+        </p:nvCxnSpPr>
+        <p:spPr>
+          <a:xfrm flipV="1">
+            <a:off x="7020272" y="3140968"/>
+            <a:ext cx="432048" cy="230882"/>
+          </a:xfrm>
+          <a:prstGeom prst="straightConnector1">
+            <a:avLst/>
+          </a:prstGeom>
+          <a:ln>
+            <a:tailEnd type="triangle"/>
+          </a:ln>
+        </p:spPr>
+        <p:style>
+          <a:lnRef idx="1">
+            <a:schemeClr val="dk1"/>
+          </a:lnRef>
+          <a:fillRef idx="0">
+            <a:schemeClr val="dk1"/>
+          </a:fillRef>
+          <a:effectRef idx="0">
+            <a:schemeClr val="dk1"/>
+          </a:effectRef>
+          <a:fontRef idx="minor">
+            <a:schemeClr val="tx1"/>
+          </a:fontRef>
+        </p:style>
+      </p:cxnSp>
+      <p:pic>
+        <p:nvPicPr>
+          <p:cNvPr id="19" name="Picture 18">
             <a:extLst>
               <a:ext uri="{FF2B5EF4-FFF2-40B4-BE49-F238E27FC236}">
-                <a16:creationId xmlns:a16="http://schemas.microsoft.com/office/drawing/2014/main" id="{2A015554-D9F3-75F6-BC5B-8C4C7522AB2C}"/>
+                <a16:creationId xmlns:a16="http://schemas.microsoft.com/office/drawing/2014/main" id="{B53D267C-0E36-2228-D211-21E2E34EA1D7}"/>
               </a:ext>
             </a:extLst>
           </p:cNvPr>
-          <p:cNvSpPr txBox="1"/>
+          <p:cNvPicPr>
+            <a:picLocks noChangeAspect="1"/>
+          </p:cNvPicPr>
           <p:nvPr/>
-        </p:nvSpPr>
-        <p:spPr>
-          <a:xfrm>
-            <a:off x="338026" y="6075641"/>
-            <a:ext cx="8421141" cy="369332"/>
+        </p:nvPicPr>
+        <p:blipFill>
+          <a:blip r:embed="rId5"/>
+          <a:stretch>
+            <a:fillRect/>
+          </a:stretch>
+        </p:blipFill>
+        <p:spPr>
+          <a:xfrm>
+            <a:off x="1907704" y="2348880"/>
+            <a:ext cx="1512168" cy="384820"/>
           </a:xfrm>
           <a:prstGeom prst="rect">
             <a:avLst/>
           </a:prstGeom>
-          <a:noFill/>
-        </p:spPr>
-        <p:txBody>
-          <a:bodyPr wrap="square" rtlCol="0">
-            <a:spAutoFit/>
-          </a:bodyPr>
+        </p:spPr>
+      </p:pic>
+      <p:cxnSp>
+        <p:nvCxnSpPr>
+          <p:cNvPr id="21" name="Straight Arrow Connector 20">
+            <a:extLst>
+              <a:ext uri="{FF2B5EF4-FFF2-40B4-BE49-F238E27FC236}">
+                <a16:creationId xmlns:a16="http://schemas.microsoft.com/office/drawing/2014/main" id="{6B0F63B8-B409-DC1B-A94C-19FA666BD33C}"/>
+              </a:ext>
+            </a:extLst>
+          </p:cNvPr>
+          <p:cNvCxnSpPr>
+            <a:cxnSpLocks/>
+          </p:cNvCxnSpPr>
+          <p:nvPr/>
+        </p:nvCxnSpPr>
+        <p:spPr>
+          <a:xfrm flipV="1">
+            <a:off x="1460852" y="2733700"/>
+            <a:ext cx="662876" cy="911324"/>
+          </a:xfrm>
+          <a:prstGeom prst="straightConnector1">
+            <a:avLst/>
+          </a:prstGeom>
+          <a:ln>
+            <a:tailEnd type="triangle"/>
+          </a:ln>
+        </p:spPr>
+        <p:style>
+          <a:lnRef idx="1">
+            <a:schemeClr val="dk1"/>
+          </a:lnRef>
+          <a:fillRef idx="0">
+            <a:schemeClr val="dk1"/>
+          </a:fillRef>
+          <a:effectRef idx="0">
+            <a:schemeClr val="dk1"/>
+          </a:effectRef>
+          <a:fontRef idx="minor">
+            <a:schemeClr val="tx1"/>
+          </a:fontRef>
+        </p:style>
+      </p:cxnSp>
+      <p:pic>
+        <p:nvPicPr>
+          <p:cNvPr id="24" name="Picture 23">
+            <a:extLst>
+              <a:ext uri="{FF2B5EF4-FFF2-40B4-BE49-F238E27FC236}">
+                <a16:creationId xmlns:a16="http://schemas.microsoft.com/office/drawing/2014/main" id="{59D5079A-DFEF-B63C-CE79-9CCEB61F2371}"/>
+              </a:ext>
+            </a:extLst>
+          </p:cNvPr>
+          <p:cNvPicPr>
+            <a:picLocks noChangeAspect="1"/>
+          </p:cNvPicPr>
+          <p:nvPr/>
+        </p:nvPicPr>
+        <p:blipFill>
+          <a:blip r:embed="rId6"/>
+          <a:stretch>
+            <a:fillRect/>
+          </a:stretch>
+        </p:blipFill>
+        <p:spPr>
+          <a:xfrm>
+            <a:off x="7488324" y="3353642"/>
+            <a:ext cx="432048" cy="532346"/>
+          </a:xfrm>
+          <a:prstGeom prst="rect">
+            <a:avLst/>
+          </a:prstGeom>
+        </p:spPr>
+      </p:pic>
+      <p:pic>
+        <p:nvPicPr>
+          <p:cNvPr id="13" name="Picture 12">
+            <a:extLst>
+              <a:ext uri="{FF2B5EF4-FFF2-40B4-BE49-F238E27FC236}">
+                <a16:creationId xmlns:a16="http://schemas.microsoft.com/office/drawing/2014/main" id="{59D5079A-DFEF-B63C-CE79-9CCEB61F2371}"/>
+              </a:ext>
+            </a:extLst>
+          </p:cNvPr>
+          <p:cNvPicPr>
+            <a:picLocks noChangeAspect="1"/>
+          </p:cNvPicPr>
+          <p:nvPr/>
+        </p:nvPicPr>
+        <p:blipFill>
+          <a:blip r:embed="rId6"/>
+          <a:stretch>
+            <a:fillRect/>
+          </a:stretch>
+        </p:blipFill>
+        <p:spPr>
+          <a:xfrm>
+            <a:off x="755576" y="1806825"/>
+            <a:ext cx="432048" cy="532346"/>
+          </a:xfrm>
+          <a:prstGeom prst="rect">
+            <a:avLst/>
+          </a:prstGeom>
+        </p:spPr>
+      </p:pic>
+      <p:pic>
+        <p:nvPicPr>
+          <p:cNvPr id="7" name="Picture 6"/>
+          <p:cNvPicPr>
+            <a:picLocks noChangeAspect="1"/>
+          </p:cNvPicPr>
+          <p:nvPr/>
+        </p:nvPicPr>
+        <p:blipFill>
+          <a:blip r:embed="rId7"/>
+          <a:stretch>
+            <a:fillRect/>
+          </a:stretch>
+        </p:blipFill>
+        <p:spPr>
+          <a:xfrm>
+            <a:off x="5015043" y="2815324"/>
+            <a:ext cx="637077" cy="651286"/>
+          </a:xfrm>
+          <a:prstGeom prst="rect">
+            <a:avLst/>
+          </a:prstGeom>
+        </p:spPr>
+      </p:pic>
+      <p:sp>
+        <p:nvSpPr>
+          <p:cNvPr id="15" name="Rounded Rectangle 14"/>
+          <p:cNvSpPr/>
+          <p:nvPr/>
+        </p:nvSpPr>
+        <p:spPr>
+          <a:xfrm>
+            <a:off x="5364088" y="4064310"/>
+            <a:ext cx="3646520" cy="1101274"/>
+          </a:xfrm>
+          <a:prstGeom prst="roundRect">
+            <a:avLst/>
+          </a:prstGeom>
+        </p:spPr>
+        <p:style>
+          <a:lnRef idx="2">
+            <a:schemeClr val="dk1"/>
+          </a:lnRef>
+          <a:fillRef idx="1">
+            <a:schemeClr val="lt1"/>
+          </a:fillRef>
+          <a:effectRef idx="0">
+            <a:schemeClr val="dk1"/>
+          </a:effectRef>
+          <a:fontRef idx="minor">
+            <a:schemeClr val="dk1"/>
+          </a:fontRef>
+        </p:style>
+        <p:txBody>
+          <a:bodyPr rtlCol="0" anchor="ctr"/>
           <a:lstStyle/>
           <a:p>
-            <a:r>
-              <a:rPr lang="en-US">
-                <a:sym typeface="Wingdings" panose="05000000000000000000" pitchFamily="2" charset="2"/>
-              </a:rPr>
-              <a:t> </a:t>
-            </a:r>
-            <a:r>
-              <a:rPr lang="en-US">
-                <a:latin typeface="Times New Roman" panose="02020603050405020304" pitchFamily="18" charset="0"/>
-                <a:cs typeface="Times New Roman" panose="02020603050405020304" pitchFamily="18" charset="0"/>
-                <a:sym typeface="Wingdings" panose="05000000000000000000" pitchFamily="2" charset="2"/>
-              </a:rPr>
-              <a:t>Cả 3 nhà máy đều có nhu cầu truy cập Internet</a:t>
-            </a:r>
-            <a:endParaRPr lang="en-US">
+            <a:pPr algn="ctr"/>
+            <a:r>
+              <a:rPr lang="en-US" sz="1200" dirty="0" err="1" smtClean="0">
+                <a:latin typeface="Times New Roman" panose="02020603050405020304" pitchFamily="18" charset="0"/>
+                <a:cs typeface="Times New Roman" panose="02020603050405020304" pitchFamily="18" charset="0"/>
+              </a:rPr>
+              <a:t>Ngày</a:t>
+            </a:r>
+            <a:r>
+              <a:rPr lang="en-US" sz="1200" dirty="0" smtClean="0">
+                <a:latin typeface="Times New Roman" panose="02020603050405020304" pitchFamily="18" charset="0"/>
+                <a:cs typeface="Times New Roman" panose="02020603050405020304" pitchFamily="18" charset="0"/>
+              </a:rPr>
+              <a:t> 6/10/2025 </a:t>
+            </a:r>
+            <a:r>
+              <a:rPr lang="en-US" sz="1200" dirty="0" err="1" smtClean="0">
+                <a:latin typeface="Times New Roman" panose="02020603050405020304" pitchFamily="18" charset="0"/>
+                <a:cs typeface="Times New Roman" panose="02020603050405020304" pitchFamily="18" charset="0"/>
+              </a:rPr>
+              <a:t>đường</a:t>
+            </a:r>
+            <a:r>
+              <a:rPr lang="en-US" sz="1200" dirty="0" smtClean="0">
+                <a:latin typeface="Times New Roman" panose="02020603050405020304" pitchFamily="18" charset="0"/>
+                <a:cs typeface="Times New Roman" panose="02020603050405020304" pitchFamily="18" charset="0"/>
+              </a:rPr>
+              <a:t> </a:t>
+            </a:r>
+            <a:r>
+              <a:rPr lang="en-US" sz="1200" dirty="0" err="1" smtClean="0">
+                <a:latin typeface="Times New Roman" panose="02020603050405020304" pitchFamily="18" charset="0"/>
+                <a:cs typeface="Times New Roman" panose="02020603050405020304" pitchFamily="18" charset="0"/>
+              </a:rPr>
+              <a:t>mạng</a:t>
+            </a:r>
+            <a:r>
+              <a:rPr lang="en-US" sz="1200" dirty="0" smtClean="0">
+                <a:latin typeface="Times New Roman" panose="02020603050405020304" pitchFamily="18" charset="0"/>
+                <a:cs typeface="Times New Roman" panose="02020603050405020304" pitchFamily="18" charset="0"/>
+              </a:rPr>
+              <a:t> </a:t>
+            </a:r>
+            <a:r>
+              <a:rPr lang="en-US" sz="1200" dirty="0" err="1" smtClean="0">
+                <a:latin typeface="Times New Roman" panose="02020603050405020304" pitchFamily="18" charset="0"/>
+                <a:cs typeface="Times New Roman" panose="02020603050405020304" pitchFamily="18" charset="0"/>
+              </a:rPr>
+              <a:t>của</a:t>
+            </a:r>
+            <a:r>
+              <a:rPr lang="en-US" sz="1200" dirty="0" smtClean="0">
+                <a:latin typeface="Times New Roman" panose="02020603050405020304" pitchFamily="18" charset="0"/>
+                <a:cs typeface="Times New Roman" panose="02020603050405020304" pitchFamily="18" charset="0"/>
+              </a:rPr>
+              <a:t> VNPT </a:t>
+            </a:r>
+            <a:r>
+              <a:rPr lang="en-US" sz="1200" dirty="0" err="1" smtClean="0">
+                <a:latin typeface="Times New Roman" panose="02020603050405020304" pitchFamily="18" charset="0"/>
+                <a:cs typeface="Times New Roman" panose="02020603050405020304" pitchFamily="18" charset="0"/>
+              </a:rPr>
+              <a:t>cấp</a:t>
+            </a:r>
+            <a:r>
+              <a:rPr lang="en-US" sz="1200" dirty="0" smtClean="0">
+                <a:latin typeface="Times New Roman" panose="02020603050405020304" pitchFamily="18" charset="0"/>
+                <a:cs typeface="Times New Roman" panose="02020603050405020304" pitchFamily="18" charset="0"/>
+              </a:rPr>
+              <a:t> </a:t>
+            </a:r>
+            <a:r>
+              <a:rPr lang="en-US" sz="1200" dirty="0" err="1" smtClean="0">
+                <a:latin typeface="Times New Roman" panose="02020603050405020304" pitchFamily="18" charset="0"/>
+                <a:cs typeface="Times New Roman" panose="02020603050405020304" pitchFamily="18" charset="0"/>
+              </a:rPr>
+              <a:t>cho</a:t>
+            </a:r>
+            <a:r>
+              <a:rPr lang="en-US" sz="1200" dirty="0" smtClean="0">
+                <a:latin typeface="Times New Roman" panose="02020603050405020304" pitchFamily="18" charset="0"/>
+                <a:cs typeface="Times New Roman" panose="02020603050405020304" pitchFamily="18" charset="0"/>
+              </a:rPr>
+              <a:t> </a:t>
+            </a:r>
+            <a:r>
+              <a:rPr lang="en-US" sz="1200" dirty="0" err="1" smtClean="0">
+                <a:latin typeface="Times New Roman" panose="02020603050405020304" pitchFamily="18" charset="0"/>
+                <a:cs typeface="Times New Roman" panose="02020603050405020304" pitchFamily="18" charset="0"/>
+              </a:rPr>
+              <a:t>nhà</a:t>
+            </a:r>
+            <a:r>
+              <a:rPr lang="en-US" sz="1200" dirty="0" smtClean="0">
+                <a:latin typeface="Times New Roman" panose="02020603050405020304" pitchFamily="18" charset="0"/>
+                <a:cs typeface="Times New Roman" panose="02020603050405020304" pitchFamily="18" charset="0"/>
+              </a:rPr>
+              <a:t> </a:t>
+            </a:r>
+            <a:r>
+              <a:rPr lang="en-US" sz="1200" dirty="0" err="1" smtClean="0">
+                <a:latin typeface="Times New Roman" panose="02020603050405020304" pitchFamily="18" charset="0"/>
+                <a:cs typeface="Times New Roman" panose="02020603050405020304" pitchFamily="18" charset="0"/>
+              </a:rPr>
+              <a:t>máy</a:t>
+            </a:r>
+            <a:r>
+              <a:rPr lang="en-US" sz="1200" dirty="0" smtClean="0">
+                <a:latin typeface="Times New Roman" panose="02020603050405020304" pitchFamily="18" charset="0"/>
+                <a:cs typeface="Times New Roman" panose="02020603050405020304" pitchFamily="18" charset="0"/>
+              </a:rPr>
+              <a:t> DD2 </a:t>
+            </a:r>
+            <a:r>
+              <a:rPr lang="en-US" sz="1200" dirty="0" err="1" smtClean="0">
+                <a:latin typeface="Times New Roman" panose="02020603050405020304" pitchFamily="18" charset="0"/>
+                <a:cs typeface="Times New Roman" panose="02020603050405020304" pitchFamily="18" charset="0"/>
+              </a:rPr>
+              <a:t>bị</a:t>
+            </a:r>
+            <a:r>
+              <a:rPr lang="en-US" sz="1200" dirty="0" smtClean="0">
+                <a:latin typeface="Times New Roman" panose="02020603050405020304" pitchFamily="18" charset="0"/>
+                <a:cs typeface="Times New Roman" panose="02020603050405020304" pitchFamily="18" charset="0"/>
+              </a:rPr>
+              <a:t> </a:t>
+            </a:r>
+            <a:r>
+              <a:rPr lang="en-US" sz="1200" dirty="0" err="1" smtClean="0">
+                <a:latin typeface="Times New Roman" panose="02020603050405020304" pitchFamily="18" charset="0"/>
+                <a:cs typeface="Times New Roman" panose="02020603050405020304" pitchFamily="18" charset="0"/>
+              </a:rPr>
+              <a:t>sự</a:t>
+            </a:r>
+            <a:r>
+              <a:rPr lang="en-US" sz="1200" dirty="0" smtClean="0">
+                <a:latin typeface="Times New Roman" panose="02020603050405020304" pitchFamily="18" charset="0"/>
+                <a:cs typeface="Times New Roman" panose="02020603050405020304" pitchFamily="18" charset="0"/>
+              </a:rPr>
+              <a:t> </a:t>
+            </a:r>
+            <a:r>
+              <a:rPr lang="en-US" sz="1200" dirty="0" err="1" smtClean="0">
+                <a:latin typeface="Times New Roman" panose="02020603050405020304" pitchFamily="18" charset="0"/>
+                <a:cs typeface="Times New Roman" panose="02020603050405020304" pitchFamily="18" charset="0"/>
+              </a:rPr>
+              <a:t>cố</a:t>
+            </a:r>
+            <a:r>
+              <a:rPr lang="en-US" sz="1200" dirty="0" smtClean="0">
+                <a:latin typeface="Times New Roman" panose="02020603050405020304" pitchFamily="18" charset="0"/>
+                <a:cs typeface="Times New Roman" panose="02020603050405020304" pitchFamily="18" charset="0"/>
+              </a:rPr>
+              <a:t> do </a:t>
+            </a:r>
+            <a:r>
+              <a:rPr lang="en-US" sz="1200" dirty="0" err="1" smtClean="0">
+                <a:latin typeface="Times New Roman" panose="02020603050405020304" pitchFamily="18" charset="0"/>
+                <a:cs typeface="Times New Roman" panose="02020603050405020304" pitchFamily="18" charset="0"/>
+              </a:rPr>
+              <a:t>lỗi</a:t>
+            </a:r>
+            <a:r>
+              <a:rPr lang="en-US" sz="1200" dirty="0" smtClean="0">
+                <a:latin typeface="Times New Roman" panose="02020603050405020304" pitchFamily="18" charset="0"/>
+                <a:cs typeface="Times New Roman" panose="02020603050405020304" pitchFamily="18" charset="0"/>
+              </a:rPr>
+              <a:t> </a:t>
+            </a:r>
+            <a:r>
+              <a:rPr lang="en-US" sz="1200" dirty="0" err="1" smtClean="0">
+                <a:latin typeface="Times New Roman" panose="02020603050405020304" pitchFamily="18" charset="0"/>
+                <a:cs typeface="Times New Roman" panose="02020603050405020304" pitchFamily="18" charset="0"/>
+              </a:rPr>
+              <a:t>hạ</a:t>
+            </a:r>
+            <a:r>
+              <a:rPr lang="en-US" sz="1200" dirty="0" smtClean="0">
+                <a:latin typeface="Times New Roman" panose="02020603050405020304" pitchFamily="18" charset="0"/>
+                <a:cs typeface="Times New Roman" panose="02020603050405020304" pitchFamily="18" charset="0"/>
+              </a:rPr>
+              <a:t> </a:t>
+            </a:r>
+            <a:r>
+              <a:rPr lang="en-US" sz="1200" dirty="0" err="1" smtClean="0">
+                <a:latin typeface="Times New Roman" panose="02020603050405020304" pitchFamily="18" charset="0"/>
+                <a:cs typeface="Times New Roman" panose="02020603050405020304" pitchFamily="18" charset="0"/>
+              </a:rPr>
+              <a:t>tầng</a:t>
+            </a:r>
+            <a:r>
+              <a:rPr lang="en-US" sz="1200" dirty="0" smtClean="0">
+                <a:latin typeface="Times New Roman" panose="02020603050405020304" pitchFamily="18" charset="0"/>
+                <a:cs typeface="Times New Roman" panose="02020603050405020304" pitchFamily="18" charset="0"/>
+              </a:rPr>
+              <a:t> </a:t>
+            </a:r>
+            <a:r>
+              <a:rPr lang="en-US" sz="1200" dirty="0" err="1" smtClean="0">
+                <a:latin typeface="Times New Roman" panose="02020603050405020304" pitchFamily="18" charset="0"/>
+                <a:cs typeface="Times New Roman" panose="02020603050405020304" pitchFamily="18" charset="0"/>
+              </a:rPr>
+              <a:t>của</a:t>
+            </a:r>
+            <a:r>
+              <a:rPr lang="en-US" sz="1200" dirty="0" smtClean="0">
+                <a:latin typeface="Times New Roman" panose="02020603050405020304" pitchFamily="18" charset="0"/>
+                <a:cs typeface="Times New Roman" panose="02020603050405020304" pitchFamily="18" charset="0"/>
+              </a:rPr>
+              <a:t> </a:t>
+            </a:r>
+            <a:r>
+              <a:rPr lang="en-US" sz="1200" dirty="0" err="1" smtClean="0">
+                <a:latin typeface="Times New Roman" panose="02020603050405020304" pitchFamily="18" charset="0"/>
+                <a:cs typeface="Times New Roman" panose="02020603050405020304" pitchFamily="18" charset="0"/>
+              </a:rPr>
+              <a:t>nhà</a:t>
+            </a:r>
+            <a:r>
+              <a:rPr lang="en-US" sz="1200" dirty="0" smtClean="0">
+                <a:latin typeface="Times New Roman" panose="02020603050405020304" pitchFamily="18" charset="0"/>
+                <a:cs typeface="Times New Roman" panose="02020603050405020304" pitchFamily="18" charset="0"/>
+              </a:rPr>
+              <a:t> </a:t>
+            </a:r>
+            <a:r>
+              <a:rPr lang="en-US" sz="1200" dirty="0" err="1" smtClean="0">
+                <a:latin typeface="Times New Roman" panose="02020603050405020304" pitchFamily="18" charset="0"/>
+                <a:cs typeface="Times New Roman" panose="02020603050405020304" pitchFamily="18" charset="0"/>
+              </a:rPr>
+              <a:t>mạng</a:t>
+            </a:r>
+            <a:r>
+              <a:rPr lang="en-US" sz="1200" dirty="0" smtClean="0">
+                <a:latin typeface="Times New Roman" panose="02020603050405020304" pitchFamily="18" charset="0"/>
+                <a:cs typeface="Times New Roman" panose="02020603050405020304" pitchFamily="18" charset="0"/>
+              </a:rPr>
+              <a:t>, </a:t>
+            </a:r>
+            <a:r>
+              <a:rPr lang="en-US" sz="1200" dirty="0" err="1" smtClean="0">
+                <a:latin typeface="Times New Roman" panose="02020603050405020304" pitchFamily="18" charset="0"/>
+                <a:cs typeface="Times New Roman" panose="02020603050405020304" pitchFamily="18" charset="0"/>
+              </a:rPr>
+              <a:t>dẫn</a:t>
+            </a:r>
+            <a:r>
+              <a:rPr lang="en-US" sz="1200" dirty="0" smtClean="0">
+                <a:latin typeface="Times New Roman" panose="02020603050405020304" pitchFamily="18" charset="0"/>
+                <a:cs typeface="Times New Roman" panose="02020603050405020304" pitchFamily="18" charset="0"/>
+              </a:rPr>
+              <a:t> </a:t>
+            </a:r>
+            <a:r>
+              <a:rPr lang="en-US" sz="1200" dirty="0" err="1" smtClean="0">
+                <a:latin typeface="Times New Roman" panose="02020603050405020304" pitchFamily="18" charset="0"/>
+                <a:cs typeface="Times New Roman" panose="02020603050405020304" pitchFamily="18" charset="0"/>
+              </a:rPr>
+              <a:t>đến</a:t>
+            </a:r>
+            <a:r>
+              <a:rPr lang="en-US" sz="1200" dirty="0" smtClean="0">
+                <a:latin typeface="Times New Roman" panose="02020603050405020304" pitchFamily="18" charset="0"/>
+                <a:cs typeface="Times New Roman" panose="02020603050405020304" pitchFamily="18" charset="0"/>
+              </a:rPr>
+              <a:t>: </a:t>
+            </a:r>
+          </a:p>
+          <a:p>
+            <a:pPr algn="ctr"/>
+            <a:r>
+              <a:rPr lang="en-US" sz="1200" dirty="0" smtClean="0">
+                <a:latin typeface="Times New Roman" panose="02020603050405020304" pitchFamily="18" charset="0"/>
+                <a:cs typeface="Times New Roman" panose="02020603050405020304" pitchFamily="18" charset="0"/>
+              </a:rPr>
+              <a:t>+ </a:t>
+            </a:r>
+            <a:r>
+              <a:rPr lang="en-US" sz="1200" dirty="0" err="1" smtClean="0">
+                <a:latin typeface="Times New Roman" panose="02020603050405020304" pitchFamily="18" charset="0"/>
+                <a:cs typeface="Times New Roman" panose="02020603050405020304" pitchFamily="18" charset="0"/>
+              </a:rPr>
+              <a:t>máy</a:t>
+            </a:r>
+            <a:r>
+              <a:rPr lang="en-US" sz="1200" dirty="0" smtClean="0">
+                <a:latin typeface="Times New Roman" panose="02020603050405020304" pitchFamily="18" charset="0"/>
+                <a:cs typeface="Times New Roman" panose="02020603050405020304" pitchFamily="18" charset="0"/>
+              </a:rPr>
+              <a:t> </a:t>
+            </a:r>
+            <a:r>
+              <a:rPr lang="en-US" sz="1200" dirty="0" err="1" smtClean="0">
+                <a:latin typeface="Times New Roman" panose="02020603050405020304" pitchFamily="18" charset="0"/>
+                <a:cs typeface="Times New Roman" panose="02020603050405020304" pitchFamily="18" charset="0"/>
+              </a:rPr>
+              <a:t>tính</a:t>
+            </a:r>
+            <a:r>
+              <a:rPr lang="en-US" sz="1200" dirty="0" smtClean="0">
+                <a:latin typeface="Times New Roman" panose="02020603050405020304" pitchFamily="18" charset="0"/>
+                <a:cs typeface="Times New Roman" panose="02020603050405020304" pitchFamily="18" charset="0"/>
+              </a:rPr>
+              <a:t> DD2 </a:t>
+            </a:r>
+            <a:r>
+              <a:rPr lang="en-US" sz="1200" dirty="0" err="1" smtClean="0">
+                <a:latin typeface="Times New Roman" panose="02020603050405020304" pitchFamily="18" charset="0"/>
+                <a:cs typeface="Times New Roman" panose="02020603050405020304" pitchFamily="18" charset="0"/>
+              </a:rPr>
+              <a:t>không</a:t>
+            </a:r>
+            <a:r>
+              <a:rPr lang="en-US" sz="1200" dirty="0" smtClean="0">
+                <a:latin typeface="Times New Roman" panose="02020603050405020304" pitchFamily="18" charset="0"/>
+                <a:cs typeface="Times New Roman" panose="02020603050405020304" pitchFamily="18" charset="0"/>
+              </a:rPr>
+              <a:t> </a:t>
+            </a:r>
+            <a:r>
+              <a:rPr lang="en-US" sz="1200" dirty="0" err="1" smtClean="0">
+                <a:latin typeface="Times New Roman" panose="02020603050405020304" pitchFamily="18" charset="0"/>
+                <a:cs typeface="Times New Roman" panose="02020603050405020304" pitchFamily="18" charset="0"/>
+              </a:rPr>
+              <a:t>thể</a:t>
+            </a:r>
+            <a:r>
+              <a:rPr lang="en-US" sz="1200" dirty="0" smtClean="0">
+                <a:latin typeface="Times New Roman" panose="02020603050405020304" pitchFamily="18" charset="0"/>
+                <a:cs typeface="Times New Roman" panose="02020603050405020304" pitchFamily="18" charset="0"/>
+              </a:rPr>
+              <a:t> </a:t>
+            </a:r>
+            <a:r>
+              <a:rPr lang="en-US" sz="1200" dirty="0" err="1" smtClean="0">
+                <a:latin typeface="Times New Roman" panose="02020603050405020304" pitchFamily="18" charset="0"/>
+                <a:cs typeface="Times New Roman" panose="02020603050405020304" pitchFamily="18" charset="0"/>
+              </a:rPr>
+              <a:t>gửi</a:t>
+            </a:r>
+            <a:r>
+              <a:rPr lang="en-US" sz="1200" dirty="0" smtClean="0">
+                <a:latin typeface="Times New Roman" panose="02020603050405020304" pitchFamily="18" charset="0"/>
+                <a:cs typeface="Times New Roman" panose="02020603050405020304" pitchFamily="18" charset="0"/>
+              </a:rPr>
+              <a:t> </a:t>
+            </a:r>
+            <a:r>
+              <a:rPr lang="en-US" sz="1200" dirty="0" err="1" smtClean="0">
+                <a:latin typeface="Times New Roman" panose="02020603050405020304" pitchFamily="18" charset="0"/>
+                <a:cs typeface="Times New Roman" panose="02020603050405020304" pitchFamily="18" charset="0"/>
+              </a:rPr>
+              <a:t>và</a:t>
+            </a:r>
+            <a:r>
+              <a:rPr lang="en-US" sz="1200" dirty="0" smtClean="0">
+                <a:latin typeface="Times New Roman" panose="02020603050405020304" pitchFamily="18" charset="0"/>
+                <a:cs typeface="Times New Roman" panose="02020603050405020304" pitchFamily="18" charset="0"/>
+              </a:rPr>
+              <a:t> </a:t>
+            </a:r>
+            <a:r>
+              <a:rPr lang="en-US" sz="1200" dirty="0" err="1" smtClean="0">
+                <a:latin typeface="Times New Roman" panose="02020603050405020304" pitchFamily="18" charset="0"/>
+                <a:cs typeface="Times New Roman" panose="02020603050405020304" pitchFamily="18" charset="0"/>
+              </a:rPr>
+              <a:t>nhận</a:t>
+            </a:r>
+            <a:r>
+              <a:rPr lang="en-US" sz="1200" dirty="0" smtClean="0">
+                <a:latin typeface="Times New Roman" panose="02020603050405020304" pitchFamily="18" charset="0"/>
+                <a:cs typeface="Times New Roman" panose="02020603050405020304" pitchFamily="18" charset="0"/>
+              </a:rPr>
+              <a:t> mail </a:t>
+            </a:r>
+            <a:r>
+              <a:rPr lang="en-US" sz="1200" dirty="0" err="1" smtClean="0">
+                <a:latin typeface="Times New Roman" panose="02020603050405020304" pitchFamily="18" charset="0"/>
+                <a:cs typeface="Times New Roman" panose="02020603050405020304" pitchFamily="18" charset="0"/>
+              </a:rPr>
+              <a:t>của</a:t>
+            </a:r>
+            <a:r>
+              <a:rPr lang="en-US" sz="1200" dirty="0" smtClean="0">
+                <a:latin typeface="Times New Roman" panose="02020603050405020304" pitchFamily="18" charset="0"/>
+                <a:cs typeface="Times New Roman" panose="02020603050405020304" pitchFamily="18" charset="0"/>
+              </a:rPr>
+              <a:t> </a:t>
+            </a:r>
+            <a:r>
+              <a:rPr lang="en-US" sz="1200" dirty="0" err="1" smtClean="0">
+                <a:latin typeface="Times New Roman" panose="02020603050405020304" pitchFamily="18" charset="0"/>
+                <a:cs typeface="Times New Roman" panose="02020603050405020304" pitchFamily="18" charset="0"/>
+              </a:rPr>
+              <a:t>khách</a:t>
+            </a:r>
+            <a:r>
+              <a:rPr lang="en-US" sz="1200" dirty="0" smtClean="0">
+                <a:latin typeface="Times New Roman" panose="02020603050405020304" pitchFamily="18" charset="0"/>
+                <a:cs typeface="Times New Roman" panose="02020603050405020304" pitchFamily="18" charset="0"/>
+              </a:rPr>
+              <a:t> hang(do </a:t>
+            </a:r>
+            <a:r>
+              <a:rPr lang="en-US" sz="1200" dirty="0" err="1" smtClean="0">
+                <a:latin typeface="Times New Roman" panose="02020603050405020304" pitchFamily="18" charset="0"/>
+                <a:cs typeface="Times New Roman" panose="02020603050405020304" pitchFamily="18" charset="0"/>
+              </a:rPr>
+              <a:t>mất</a:t>
+            </a:r>
+            <a:r>
+              <a:rPr lang="en-US" sz="1200" dirty="0" smtClean="0">
+                <a:latin typeface="Times New Roman" panose="02020603050405020304" pitchFamily="18" charset="0"/>
+                <a:cs typeface="Times New Roman" panose="02020603050405020304" pitchFamily="18" charset="0"/>
+              </a:rPr>
+              <a:t> </a:t>
+            </a:r>
+            <a:r>
+              <a:rPr lang="en-US" sz="1200" dirty="0" err="1" smtClean="0">
+                <a:latin typeface="Times New Roman" panose="02020603050405020304" pitchFamily="18" charset="0"/>
+                <a:cs typeface="Times New Roman" panose="02020603050405020304" pitchFamily="18" charset="0"/>
+              </a:rPr>
+              <a:t>kết</a:t>
+            </a:r>
+            <a:r>
+              <a:rPr lang="en-US" sz="1200" dirty="0" smtClean="0">
+                <a:latin typeface="Times New Roman" panose="02020603050405020304" pitchFamily="18" charset="0"/>
+                <a:cs typeface="Times New Roman" panose="02020603050405020304" pitchFamily="18" charset="0"/>
+              </a:rPr>
+              <a:t> </a:t>
+            </a:r>
+            <a:r>
+              <a:rPr lang="en-US" sz="1200" dirty="0" err="1" smtClean="0">
+                <a:latin typeface="Times New Roman" panose="02020603050405020304" pitchFamily="18" charset="0"/>
+                <a:cs typeface="Times New Roman" panose="02020603050405020304" pitchFamily="18" charset="0"/>
+              </a:rPr>
+              <a:t>nối</a:t>
+            </a:r>
+            <a:r>
+              <a:rPr lang="en-US" sz="1200" dirty="0" smtClean="0">
+                <a:latin typeface="Times New Roman" panose="02020603050405020304" pitchFamily="18" charset="0"/>
+                <a:cs typeface="Times New Roman" panose="02020603050405020304" pitchFamily="18" charset="0"/>
+              </a:rPr>
+              <a:t> internet)</a:t>
+            </a:r>
+          </a:p>
+          <a:p>
+            <a:pPr algn="ctr"/>
+            <a:r>
+              <a:rPr lang="en-US" sz="1200" dirty="0" smtClean="0">
+                <a:latin typeface="Times New Roman" panose="02020603050405020304" pitchFamily="18" charset="0"/>
+                <a:cs typeface="Times New Roman" panose="02020603050405020304" pitchFamily="18" charset="0"/>
+              </a:rPr>
+              <a:t>+ </a:t>
+            </a:r>
+            <a:r>
+              <a:rPr lang="en-US" sz="1200" dirty="0" err="1" smtClean="0">
+                <a:latin typeface="Times New Roman" panose="02020603050405020304" pitchFamily="18" charset="0"/>
+                <a:cs typeface="Times New Roman" panose="02020603050405020304" pitchFamily="18" charset="0"/>
+              </a:rPr>
+              <a:t>máy</a:t>
+            </a:r>
+            <a:r>
+              <a:rPr lang="en-US" sz="1200" dirty="0" smtClean="0">
+                <a:latin typeface="Times New Roman" panose="02020603050405020304" pitchFamily="18" charset="0"/>
+                <a:cs typeface="Times New Roman" panose="02020603050405020304" pitchFamily="18" charset="0"/>
+              </a:rPr>
+              <a:t> </a:t>
+            </a:r>
+            <a:r>
+              <a:rPr lang="en-US" sz="1200" dirty="0" err="1" smtClean="0">
+                <a:latin typeface="Times New Roman" panose="02020603050405020304" pitchFamily="18" charset="0"/>
+                <a:cs typeface="Times New Roman" panose="02020603050405020304" pitchFamily="18" charset="0"/>
+              </a:rPr>
+              <a:t>tính</a:t>
+            </a:r>
+            <a:r>
+              <a:rPr lang="en-US" sz="1200" dirty="0" smtClean="0">
+                <a:latin typeface="Times New Roman" panose="02020603050405020304" pitchFamily="18" charset="0"/>
+                <a:cs typeface="Times New Roman" panose="02020603050405020304" pitchFamily="18" charset="0"/>
+              </a:rPr>
+              <a:t> </a:t>
+            </a:r>
+            <a:r>
+              <a:rPr lang="en-US" sz="1200" dirty="0" err="1" smtClean="0">
+                <a:latin typeface="Times New Roman" panose="02020603050405020304" pitchFamily="18" charset="0"/>
+                <a:cs typeface="Times New Roman" panose="02020603050405020304" pitchFamily="18" charset="0"/>
+              </a:rPr>
+              <a:t>không</a:t>
+            </a:r>
+            <a:r>
+              <a:rPr lang="en-US" sz="1200" dirty="0" smtClean="0">
+                <a:latin typeface="Times New Roman" panose="02020603050405020304" pitchFamily="18" charset="0"/>
+                <a:cs typeface="Times New Roman" panose="02020603050405020304" pitchFamily="18" charset="0"/>
+              </a:rPr>
+              <a:t> </a:t>
+            </a:r>
+            <a:r>
+              <a:rPr lang="en-US" sz="1200" dirty="0" err="1" smtClean="0">
+                <a:latin typeface="Times New Roman" panose="02020603050405020304" pitchFamily="18" charset="0"/>
+                <a:cs typeface="Times New Roman" panose="02020603050405020304" pitchFamily="18" charset="0"/>
+              </a:rPr>
+              <a:t>thể</a:t>
+            </a:r>
+            <a:r>
+              <a:rPr lang="en-US" sz="1200" dirty="0" smtClean="0">
+                <a:latin typeface="Times New Roman" panose="02020603050405020304" pitchFamily="18" charset="0"/>
+                <a:cs typeface="Times New Roman" panose="02020603050405020304" pitchFamily="18" charset="0"/>
+              </a:rPr>
+              <a:t> </a:t>
+            </a:r>
+            <a:r>
+              <a:rPr lang="en-US" sz="1200" dirty="0" err="1" smtClean="0">
+                <a:latin typeface="Times New Roman" panose="02020603050405020304" pitchFamily="18" charset="0"/>
+                <a:cs typeface="Times New Roman" panose="02020603050405020304" pitchFamily="18" charset="0"/>
+              </a:rPr>
+              <a:t>đăng</a:t>
+            </a:r>
+            <a:r>
+              <a:rPr lang="en-US" sz="1200" dirty="0" smtClean="0">
+                <a:latin typeface="Times New Roman" panose="02020603050405020304" pitchFamily="18" charset="0"/>
+                <a:cs typeface="Times New Roman" panose="02020603050405020304" pitchFamily="18" charset="0"/>
+              </a:rPr>
+              <a:t> </a:t>
+            </a:r>
+            <a:r>
+              <a:rPr lang="en-US" sz="1200" dirty="0" err="1" smtClean="0">
+                <a:latin typeface="Times New Roman" panose="02020603050405020304" pitchFamily="18" charset="0"/>
+                <a:cs typeface="Times New Roman" panose="02020603050405020304" pitchFamily="18" charset="0"/>
+              </a:rPr>
+              <a:t>nhập</a:t>
+            </a:r>
+            <a:r>
+              <a:rPr lang="en-US" sz="1200" dirty="0" smtClean="0">
+                <a:latin typeface="Times New Roman" panose="02020603050405020304" pitchFamily="18" charset="0"/>
+                <a:cs typeface="Times New Roman" panose="02020603050405020304" pitchFamily="18" charset="0"/>
+              </a:rPr>
+              <a:t> </a:t>
+            </a:r>
+            <a:r>
+              <a:rPr lang="en-US" sz="1200" dirty="0" err="1" smtClean="0">
+                <a:latin typeface="Times New Roman" panose="02020603050405020304" pitchFamily="18" charset="0"/>
+                <a:cs typeface="Times New Roman" panose="02020603050405020304" pitchFamily="18" charset="0"/>
+              </a:rPr>
+              <a:t>được</a:t>
+            </a:r>
+            <a:endParaRPr lang="en-US" sz="1200" dirty="0" smtClean="0">
               <a:latin typeface="Times New Roman" panose="02020603050405020304" pitchFamily="18" charset="0"/>
               <a:cs typeface="Times New Roman" panose="02020603050405020304" pitchFamily="18" charset="0"/>
             </a:endParaRPr>
           </a:p>
+          <a:p>
+            <a:pPr algn="ctr"/>
+            <a:endParaRPr lang="en-US" sz="1200" dirty="0" smtClean="0">
+              <a:latin typeface="Times New Roman" panose="02020603050405020304" pitchFamily="18" charset="0"/>
+              <a:cs typeface="Times New Roman" panose="02020603050405020304" pitchFamily="18" charset="0"/>
+            </a:endParaRPr>
+          </a:p>
+          <a:p>
+            <a:pPr algn="ctr"/>
+            <a:r>
+              <a:rPr lang="en-US" sz="1200" dirty="0" smtClean="0">
+                <a:latin typeface="Times New Roman" panose="02020603050405020304" pitchFamily="18" charset="0"/>
+                <a:cs typeface="Times New Roman" panose="02020603050405020304" pitchFamily="18" charset="0"/>
+              </a:rPr>
+              <a:t> </a:t>
+            </a:r>
+            <a:endParaRPr lang="en-US" sz="1200" dirty="0">
+              <a:latin typeface="Times New Roman" panose="02020603050405020304" pitchFamily="18" charset="0"/>
+              <a:cs typeface="Times New Roman" panose="02020603050405020304" pitchFamily="18" charset="0"/>
+            </a:endParaRPr>
+          </a:p>
+        </p:txBody>
+      </p:sp>
+      <p:sp>
+        <p:nvSpPr>
+          <p:cNvPr id="16" name="Rounded Rectangle 15"/>
+          <p:cNvSpPr/>
+          <p:nvPr/>
+        </p:nvSpPr>
+        <p:spPr>
+          <a:xfrm>
+            <a:off x="251520" y="5373216"/>
+            <a:ext cx="8280920" cy="864096"/>
+          </a:xfrm>
+          <a:prstGeom prst="roundRect">
+            <a:avLst/>
+          </a:prstGeom>
+        </p:spPr>
+        <p:style>
+          <a:lnRef idx="2">
+            <a:schemeClr val="dk1"/>
+          </a:lnRef>
+          <a:fillRef idx="1">
+            <a:schemeClr val="lt1"/>
+          </a:fillRef>
+          <a:effectRef idx="0">
+            <a:schemeClr val="dk1"/>
+          </a:effectRef>
+          <a:fontRef idx="minor">
+            <a:schemeClr val="dk1"/>
+          </a:fontRef>
+        </p:style>
+        <p:txBody>
+          <a:bodyPr rtlCol="0" anchor="ctr"/>
+          <a:lstStyle/>
+          <a:p>
+            <a:pPr algn="ctr"/>
+            <a:r>
+              <a:rPr lang="en-US" dirty="0" err="1" smtClean="0"/>
+              <a:t>Vấn</a:t>
+            </a:r>
+            <a:r>
+              <a:rPr lang="en-US" dirty="0" smtClean="0"/>
+              <a:t> </a:t>
+            </a:r>
+            <a:r>
+              <a:rPr lang="en-US" dirty="0" err="1" smtClean="0"/>
+              <a:t>đề</a:t>
+            </a:r>
+            <a:r>
+              <a:rPr lang="en-US" dirty="0" smtClean="0"/>
+              <a:t> </a:t>
+            </a:r>
+            <a:r>
+              <a:rPr lang="en-US" dirty="0" err="1" smtClean="0"/>
+              <a:t>gặp</a:t>
+            </a:r>
+            <a:r>
+              <a:rPr lang="en-US" dirty="0" smtClean="0"/>
+              <a:t> </a:t>
+            </a:r>
+            <a:r>
+              <a:rPr lang="en-US" dirty="0" err="1" smtClean="0"/>
+              <a:t>phải</a:t>
+            </a:r>
+            <a:r>
+              <a:rPr lang="en-US" dirty="0" smtClean="0"/>
+              <a:t>:</a:t>
+            </a:r>
+            <a:endParaRPr lang="en-US" dirty="0"/>
+          </a:p>
         </p:txBody>
       </p:sp>
     </p:spTree>
     <p:extLst>
       <p:ext uri="{BB962C8B-B14F-4D97-AF65-F5344CB8AC3E}">
-        <p14:creationId xmlns:p14="http://schemas.microsoft.com/office/powerpoint/2010/main" val="4133231524"/>
+        <p14:creationId xmlns:p14="http://schemas.microsoft.com/office/powerpoint/2010/main" val="3380839415"/>
       </p:ext>
     </p:extLst>
   </p:cSld>
@@ -8064,6 +10375,296 @@
                 <a:latin typeface="+mn-lt"/>
               </a:rPr>
               <a:t>5</a:t>
+            </a:fld>
+            <a:endParaRPr kumimoji="1" lang="ja-JP" altLang="en-US">
+              <a:latin typeface="+mn-lt"/>
+            </a:endParaRPr>
+          </a:p>
+        </p:txBody>
+      </p:sp>
+      <p:pic>
+        <p:nvPicPr>
+          <p:cNvPr id="9" name="Picture 8">
+            <a:extLst>
+              <a:ext uri="{FF2B5EF4-FFF2-40B4-BE49-F238E27FC236}">
+                <a16:creationId xmlns:a16="http://schemas.microsoft.com/office/drawing/2014/main" id="{ECE600D1-3C78-6923-9B76-65BFE98A3287}"/>
+              </a:ext>
+            </a:extLst>
+          </p:cNvPr>
+          <p:cNvPicPr>
+            <a:picLocks noChangeAspect="1"/>
+          </p:cNvPicPr>
+          <p:nvPr/>
+        </p:nvPicPr>
+        <p:blipFill>
+          <a:blip r:embed="rId3"/>
+          <a:stretch>
+            <a:fillRect/>
+          </a:stretch>
+        </p:blipFill>
+        <p:spPr>
+          <a:xfrm>
+            <a:off x="471339" y="1307449"/>
+            <a:ext cx="5832648" cy="3551108"/>
+          </a:xfrm>
+          <a:prstGeom prst="rect">
+            <a:avLst/>
+          </a:prstGeom>
+        </p:spPr>
+      </p:pic>
+      <p:sp>
+        <p:nvSpPr>
+          <p:cNvPr id="3" name="TextBox 2">
+            <a:extLst>
+              <a:ext uri="{FF2B5EF4-FFF2-40B4-BE49-F238E27FC236}">
+                <a16:creationId xmlns:a16="http://schemas.microsoft.com/office/drawing/2014/main" id="{AB8A9502-D629-5EE6-2395-D1818F6873D4}"/>
+              </a:ext>
+            </a:extLst>
+          </p:cNvPr>
+          <p:cNvSpPr txBox="1"/>
+          <p:nvPr/>
+        </p:nvSpPr>
+        <p:spPr>
+          <a:xfrm>
+            <a:off x="204714" y="911612"/>
+            <a:ext cx="8687766" cy="338554"/>
+          </a:xfrm>
+          <a:prstGeom prst="rect">
+            <a:avLst/>
+          </a:prstGeom>
+          <a:noFill/>
+        </p:spPr>
+        <p:txBody>
+          <a:bodyPr wrap="square" rtlCol="0">
+            <a:spAutoFit/>
+          </a:bodyPr>
+          <a:lstStyle/>
+          <a:p>
+            <a:r>
+              <a:rPr lang="en-US" sz="1600" b="1">
+                <a:latin typeface="Times New Roman" panose="02020603050405020304" pitchFamily="18" charset="0"/>
+                <a:cs typeface="Times New Roman" panose="02020603050405020304" pitchFamily="18" charset="0"/>
+              </a:rPr>
+              <a:t>1) Truy cập Internet để phục vụ công việc phòng ban cũng như trao đổi công việc với khách hàng</a:t>
+            </a:r>
+          </a:p>
+        </p:txBody>
+      </p:sp>
+      <p:sp>
+        <p:nvSpPr>
+          <p:cNvPr id="5" name="TextBox 4">
+            <a:extLst>
+              <a:ext uri="{FF2B5EF4-FFF2-40B4-BE49-F238E27FC236}">
+                <a16:creationId xmlns:a16="http://schemas.microsoft.com/office/drawing/2014/main" id="{7F6CEBD1-28EB-ACD8-EF7D-5930D5AAFD99}"/>
+              </a:ext>
+            </a:extLst>
+          </p:cNvPr>
+          <p:cNvSpPr txBox="1"/>
+          <p:nvPr/>
+        </p:nvSpPr>
+        <p:spPr>
+          <a:xfrm>
+            <a:off x="323528" y="4977554"/>
+            <a:ext cx="8568952" cy="1169551"/>
+          </a:xfrm>
+          <a:prstGeom prst="rect">
+            <a:avLst/>
+          </a:prstGeom>
+          <a:noFill/>
+        </p:spPr>
+        <p:txBody>
+          <a:bodyPr wrap="square" rtlCol="0">
+            <a:spAutoFit/>
+          </a:bodyPr>
+          <a:lstStyle/>
+          <a:p>
+            <a:pPr marL="285750" indent="-285750">
+              <a:buFontTx/>
+              <a:buChar char="-"/>
+            </a:pPr>
+            <a:r>
+              <a:rPr lang="en-US" sz="1400">
+                <a:latin typeface="Times New Roman" panose="02020603050405020304" pitchFamily="18" charset="0"/>
+                <a:cs typeface="Times New Roman" panose="02020603050405020304" pitchFamily="18" charset="0"/>
+              </a:rPr>
+              <a:t>CNV sử dụng Mail Outlook để trao đổi công việc nội bộ công ty hoặc là liên lạc công việc với đối tác, khách hàng (3 nhà máy).</a:t>
+            </a:r>
+          </a:p>
+          <a:p>
+            <a:pPr marL="285750" indent="-285750">
+              <a:buFontTx/>
+              <a:buChar char="-"/>
+            </a:pPr>
+            <a:r>
+              <a:rPr lang="en-US" sz="1400">
+                <a:latin typeface="Times New Roman" panose="02020603050405020304" pitchFamily="18" charset="0"/>
+                <a:cs typeface="Times New Roman" panose="02020603050405020304" pitchFamily="18" charset="0"/>
+              </a:rPr>
+              <a:t>Nhóm Hải Quan cần sử dụng mạng Internet để truy cập hệ thống hải quan để khai báo thủ tục, giấy tờ liên quan. </a:t>
+            </a:r>
+          </a:p>
+          <a:p>
+            <a:pPr marL="285750" indent="-285750">
+              <a:buFontTx/>
+              <a:buChar char="-"/>
+            </a:pPr>
+            <a:r>
+              <a:rPr lang="en-US" sz="1400">
+                <a:latin typeface="Times New Roman" panose="02020603050405020304" pitchFamily="18" charset="0"/>
+                <a:cs typeface="Times New Roman" panose="02020603050405020304" pitchFamily="18" charset="0"/>
+              </a:rPr>
+              <a:t>Nhóm Marketing truy cập Internet để quản lý Fanpage công ty trên Facebook…..</a:t>
+            </a:r>
+          </a:p>
+          <a:p>
+            <a:pPr marL="285750" indent="-285750">
+              <a:buFontTx/>
+              <a:buChar char="-"/>
+            </a:pPr>
+            <a:r>
+              <a:rPr lang="en-US" sz="1400">
+                <a:latin typeface="Times New Roman" panose="02020603050405020304" pitchFamily="18" charset="0"/>
+                <a:cs typeface="Times New Roman" panose="02020603050405020304" pitchFamily="18" charset="0"/>
+              </a:rPr>
+              <a:t>Nhóm QC truy cập trang Web của Brother để cập nhật dữ liệu của khách hàng….</a:t>
+            </a:r>
+          </a:p>
+        </p:txBody>
+      </p:sp>
+      <p:sp>
+        <p:nvSpPr>
+          <p:cNvPr id="6" name="TextBox 5">
+            <a:extLst>
+              <a:ext uri="{FF2B5EF4-FFF2-40B4-BE49-F238E27FC236}">
+                <a16:creationId xmlns:a16="http://schemas.microsoft.com/office/drawing/2014/main" id="{2A015554-D9F3-75F6-BC5B-8C4C7522AB2C}"/>
+              </a:ext>
+            </a:extLst>
+          </p:cNvPr>
+          <p:cNvSpPr txBox="1"/>
+          <p:nvPr/>
+        </p:nvSpPr>
+        <p:spPr>
+          <a:xfrm>
+            <a:off x="338026" y="6075641"/>
+            <a:ext cx="8421141" cy="369332"/>
+          </a:xfrm>
+          <a:prstGeom prst="rect">
+            <a:avLst/>
+          </a:prstGeom>
+          <a:noFill/>
+        </p:spPr>
+        <p:txBody>
+          <a:bodyPr wrap="square" rtlCol="0">
+            <a:spAutoFit/>
+          </a:bodyPr>
+          <a:lstStyle/>
+          <a:p>
+            <a:r>
+              <a:rPr lang="en-US">
+                <a:sym typeface="Wingdings" panose="05000000000000000000" pitchFamily="2" charset="2"/>
+              </a:rPr>
+              <a:t> </a:t>
+            </a:r>
+            <a:r>
+              <a:rPr lang="en-US">
+                <a:latin typeface="Times New Roman" panose="02020603050405020304" pitchFamily="18" charset="0"/>
+                <a:cs typeface="Times New Roman" panose="02020603050405020304" pitchFamily="18" charset="0"/>
+                <a:sym typeface="Wingdings" panose="05000000000000000000" pitchFamily="2" charset="2"/>
+              </a:rPr>
+              <a:t>Cả 3 nhà máy đều có nhu cầu truy cập Internet</a:t>
+            </a:r>
+            <a:endParaRPr lang="en-US">
+              <a:latin typeface="Times New Roman" panose="02020603050405020304" pitchFamily="18" charset="0"/>
+              <a:cs typeface="Times New Roman" panose="02020603050405020304" pitchFamily="18" charset="0"/>
+            </a:endParaRPr>
+          </a:p>
+        </p:txBody>
+      </p:sp>
+    </p:spTree>
+    <p:extLst>
+      <p:ext uri="{BB962C8B-B14F-4D97-AF65-F5344CB8AC3E}">
+        <p14:creationId xmlns:p14="http://schemas.microsoft.com/office/powerpoint/2010/main" val="4133231524"/>
+      </p:ext>
+    </p:extLst>
+  </p:cSld>
+  <p:clrMapOvr>
+    <a:masterClrMapping/>
+  </p:clrMapOvr>
+</p:sld>
+</file>
+
+<file path=ppt/slides/slide6.xml><?xml version="1.0" encoding="utf-8"?>
+<p:sld xmlns:a="http://schemas.openxmlformats.org/drawingml/2006/main" xmlns:r="http://schemas.openxmlformats.org/officeDocument/2006/relationships" xmlns:p="http://schemas.openxmlformats.org/presentationml/2006/main">
+  <p:cSld>
+    <p:spTree>
+      <p:nvGrpSpPr>
+        <p:cNvPr id="1" name=""/>
+        <p:cNvGrpSpPr/>
+        <p:nvPr/>
+      </p:nvGrpSpPr>
+      <p:grpSpPr>
+        <a:xfrm>
+          <a:off x="0" y="0"/>
+          <a:ext cx="0" cy="0"/>
+          <a:chOff x="0" y="0"/>
+          <a:chExt cx="0" cy="0"/>
+        </a:xfrm>
+      </p:grpSpPr>
+      <p:sp>
+        <p:nvSpPr>
+          <p:cNvPr id="2" name="タイトル 1"/>
+          <p:cNvSpPr>
+            <a:spLocks noGrp="1"/>
+          </p:cNvSpPr>
+          <p:nvPr>
+            <p:ph type="ctrTitle"/>
+          </p:nvPr>
+        </p:nvSpPr>
+        <p:spPr>
+          <a:xfrm>
+            <a:off x="0" y="188640"/>
+            <a:ext cx="4860032" cy="504056"/>
+          </a:xfrm>
+          <a:noFill/>
+        </p:spPr>
+        <p:txBody>
+          <a:bodyPr lIns="0" tIns="36000" rIns="0" bIns="36000" anchor="ctr">
+            <a:noAutofit/>
+          </a:bodyPr>
+          <a:lstStyle/>
+          <a:p>
+            <a:r>
+              <a:rPr lang="en-US" altLang="ja-JP" sz="2200">
+                <a:latin typeface="+mn-lt"/>
+              </a:rPr>
+              <a:t>MÔ HÌNH MẠNG THỰC TẾ CỦA CÔNG TY</a:t>
+            </a:r>
+            <a:endParaRPr kumimoji="1" lang="en-US" altLang="ja-JP" sz="2200" dirty="0">
+              <a:latin typeface="+mn-lt"/>
+            </a:endParaRPr>
+          </a:p>
+        </p:txBody>
+      </p:sp>
+      <p:sp>
+        <p:nvSpPr>
+          <p:cNvPr id="4" name="スライド番号プレースホルダー 3"/>
+          <p:cNvSpPr>
+            <a:spLocks noGrp="1"/>
+          </p:cNvSpPr>
+          <p:nvPr>
+            <p:ph type="sldNum" sz="quarter" idx="12"/>
+          </p:nvPr>
+        </p:nvSpPr>
+        <p:spPr/>
+        <p:txBody>
+          <a:bodyPr/>
+          <a:lstStyle/>
+          <a:p>
+            <a:fld id="{D2D8002D-B5B0-4BAC-B1F6-782DDCCE6D9C}" type="slidenum">
+              <a:rPr kumimoji="1" lang="ja-JP" altLang="en-US" smtClean="0">
+                <a:latin typeface="+mn-lt"/>
+              </a:rPr>
+              <a:t>6</a:t>
             </a:fld>
             <a:endParaRPr kumimoji="1" lang="ja-JP" altLang="en-US">
               <a:latin typeface="+mn-lt"/>
@@ -8501,7 +11102,7 @@
 </p:sld>
 </file>
 
-<file path=ppt/slides/slide6.xml><?xml version="1.0" encoding="utf-8"?>
+<file path=ppt/slides/slide7.xml><?xml version="1.0" encoding="utf-8"?>
 <p:sld xmlns:a="http://schemas.openxmlformats.org/drawingml/2006/main" xmlns:r="http://schemas.openxmlformats.org/officeDocument/2006/relationships" xmlns:p="http://schemas.openxmlformats.org/presentationml/2006/main">
   <p:cSld>
     <p:spTree>
@@ -8572,7 +11173,7 @@
               <a:rPr kumimoji="1" lang="ja-JP" altLang="en-US" smtClean="0">
                 <a:latin typeface="+mn-lt"/>
               </a:rPr>
-              <a:t>6</a:t>
+              <a:t>7</a:t>
             </a:fld>
             <a:endParaRPr kumimoji="1" lang="ja-JP" altLang="en-US">
               <a:latin typeface="+mn-lt"/>
@@ -8941,7 +11542,7 @@
 </p:sld>
 </file>
 
-<file path=ppt/slides/slide7.xml><?xml version="1.0" encoding="utf-8"?>
+<file path=ppt/slides/slide8.xml><?xml version="1.0" encoding="utf-8"?>
 <p:sld xmlns:a="http://schemas.openxmlformats.org/drawingml/2006/main" xmlns:r="http://schemas.openxmlformats.org/officeDocument/2006/relationships" xmlns:p="http://schemas.openxmlformats.org/presentationml/2006/main">
   <p:cSld>
     <p:spTree>
@@ -9012,7 +11613,7 @@
               <a:rPr kumimoji="1" lang="ja-JP" altLang="en-US" smtClean="0">
                 <a:latin typeface="+mn-lt"/>
               </a:rPr>
-              <a:t>7</a:t>
+              <a:t>8</a:t>
             </a:fld>
             <a:endParaRPr kumimoji="1" lang="ja-JP" altLang="en-US">
               <a:latin typeface="+mn-lt"/>
@@ -9110,184 +11711,6 @@
     <p:extLst>
       <p:ext uri="{BB962C8B-B14F-4D97-AF65-F5344CB8AC3E}">
         <p14:creationId xmlns:p14="http://schemas.microsoft.com/office/powerpoint/2010/main" val="4108372267"/>
-      </p:ext>
-    </p:extLst>
-  </p:cSld>
-  <p:clrMapOvr>
-    <a:masterClrMapping/>
-  </p:clrMapOvr>
-</p:sld>
-</file>
-
-<file path=ppt/slides/slide8.xml><?xml version="1.0" encoding="utf-8"?>
-<p:sld xmlns:a="http://schemas.openxmlformats.org/drawingml/2006/main" xmlns:r="http://schemas.openxmlformats.org/officeDocument/2006/relationships" xmlns:p="http://schemas.openxmlformats.org/presentationml/2006/main">
-  <p:cSld>
-    <p:spTree>
-      <p:nvGrpSpPr>
-        <p:cNvPr id="1" name=""/>
-        <p:cNvGrpSpPr/>
-        <p:nvPr/>
-      </p:nvGrpSpPr>
-      <p:grpSpPr>
-        <a:xfrm>
-          <a:off x="0" y="0"/>
-          <a:ext cx="0" cy="0"/>
-          <a:chOff x="0" y="0"/>
-          <a:chExt cx="0" cy="0"/>
-        </a:xfrm>
-      </p:grpSpPr>
-      <p:sp>
-        <p:nvSpPr>
-          <p:cNvPr id="2" name="タイトル 1"/>
-          <p:cNvSpPr>
-            <a:spLocks noGrp="1"/>
-          </p:cNvSpPr>
-          <p:nvPr>
-            <p:ph type="ctrTitle"/>
-          </p:nvPr>
-        </p:nvSpPr>
-        <p:spPr>
-          <a:xfrm>
-            <a:off x="0" y="188640"/>
-            <a:ext cx="4860032" cy="504056"/>
-          </a:xfrm>
-          <a:noFill/>
-        </p:spPr>
-        <p:txBody>
-          <a:bodyPr lIns="0" tIns="36000" rIns="0" bIns="36000" anchor="ctr">
-            <a:noAutofit/>
-          </a:bodyPr>
-          <a:lstStyle/>
-          <a:p>
-            <a:r>
-              <a:rPr lang="en-US" altLang="ja-JP" sz="2200">
-                <a:latin typeface="+mn-lt"/>
-              </a:rPr>
-              <a:t>MÔ HÌNH MẠNG THỰC TẾ CỦA CÔNG TY</a:t>
-            </a:r>
-            <a:endParaRPr kumimoji="1" lang="en-US" altLang="ja-JP" sz="2200" dirty="0">
-              <a:latin typeface="+mn-lt"/>
-            </a:endParaRPr>
-          </a:p>
-        </p:txBody>
-      </p:sp>
-      <p:sp>
-        <p:nvSpPr>
-          <p:cNvPr id="4" name="スライド番号プレースホルダー 3"/>
-          <p:cNvSpPr>
-            <a:spLocks noGrp="1"/>
-          </p:cNvSpPr>
-          <p:nvPr>
-            <p:ph type="sldNum" sz="quarter" idx="12"/>
-          </p:nvPr>
-        </p:nvSpPr>
-        <p:spPr/>
-        <p:txBody>
-          <a:bodyPr/>
-          <a:lstStyle/>
-          <a:p>
-            <a:fld id="{D2D8002D-B5B0-4BAC-B1F6-782DDCCE6D9C}" type="slidenum">
-              <a:rPr kumimoji="1" lang="ja-JP" altLang="en-US" smtClean="0">
-                <a:latin typeface="+mn-lt"/>
-              </a:rPr>
-              <a:t>8</a:t>
-            </a:fld>
-            <a:endParaRPr kumimoji="1" lang="ja-JP" altLang="en-US">
-              <a:latin typeface="+mn-lt"/>
-            </a:endParaRPr>
-          </a:p>
-        </p:txBody>
-      </p:sp>
-      <p:pic>
-        <p:nvPicPr>
-          <p:cNvPr id="9" name="Picture 8">
-            <a:extLst>
-              <a:ext uri="{FF2B5EF4-FFF2-40B4-BE49-F238E27FC236}">
-                <a16:creationId xmlns:a16="http://schemas.microsoft.com/office/drawing/2014/main" id="{ECE600D1-3C78-6923-9B76-65BFE98A3287}"/>
-              </a:ext>
-            </a:extLst>
-          </p:cNvPr>
-          <p:cNvPicPr>
-            <a:picLocks noChangeAspect="1"/>
-          </p:cNvPicPr>
-          <p:nvPr/>
-        </p:nvPicPr>
-        <p:blipFill>
-          <a:blip r:embed="rId3"/>
-          <a:stretch>
-            <a:fillRect/>
-          </a:stretch>
-        </p:blipFill>
-        <p:spPr>
-          <a:xfrm>
-            <a:off x="611560" y="978048"/>
-            <a:ext cx="6840760" cy="4164879"/>
-          </a:xfrm>
-          <a:prstGeom prst="rect">
-            <a:avLst/>
-          </a:prstGeom>
-        </p:spPr>
-      </p:pic>
-      <p:sp>
-        <p:nvSpPr>
-          <p:cNvPr id="10" name="TextBox 9">
-            <a:extLst>
-              <a:ext uri="{FF2B5EF4-FFF2-40B4-BE49-F238E27FC236}">
-                <a16:creationId xmlns:a16="http://schemas.microsoft.com/office/drawing/2014/main" id="{6082423F-AA4A-0B14-7F1A-ED5A5F3C50B8}"/>
-              </a:ext>
-            </a:extLst>
-          </p:cNvPr>
-          <p:cNvSpPr txBox="1"/>
-          <p:nvPr/>
-        </p:nvSpPr>
-        <p:spPr>
-          <a:xfrm>
-            <a:off x="467544" y="5142927"/>
-            <a:ext cx="8424936" cy="1169551"/>
-          </a:xfrm>
-          <a:prstGeom prst="rect">
-            <a:avLst/>
-          </a:prstGeom>
-          <a:noFill/>
-        </p:spPr>
-        <p:txBody>
-          <a:bodyPr wrap="square" rtlCol="0">
-            <a:spAutoFit/>
-          </a:bodyPr>
-          <a:lstStyle/>
-          <a:p>
-            <a:r>
-              <a:rPr lang="en-US" sz="1400" b="1">
-                <a:latin typeface="Times New Roman" panose="02020603050405020304" pitchFamily="18" charset="0"/>
-                <a:cs typeface="Times New Roman" panose="02020603050405020304" pitchFamily="18" charset="0"/>
-              </a:rPr>
-              <a:t>Công ty Đông Dương đang sử dụng 3 đường mạng riêng biệt được cung cấp bởi nhà mạng VPNT cho hệ thống máy tính của 3 nhà máy với  mục đích chính:</a:t>
-            </a:r>
-          </a:p>
-          <a:p>
-            <a:r>
-              <a:rPr lang="en-US" sz="1400">
-                <a:latin typeface="Times New Roman" panose="02020603050405020304" pitchFamily="18" charset="0"/>
-                <a:cs typeface="Times New Roman" panose="02020603050405020304" pitchFamily="18" charset="0"/>
-              </a:rPr>
-              <a:t>1) Truy cập Internet để phục vụ công việc phòng ban cũng như trao đổi công việc với khách hàng….</a:t>
-            </a:r>
-          </a:p>
-          <a:p>
-            <a:r>
-              <a:rPr lang="en-US" sz="1400">
-                <a:latin typeface="Times New Roman" panose="02020603050405020304" pitchFamily="18" charset="0"/>
-                <a:cs typeface="Times New Roman" panose="02020603050405020304" pitchFamily="18" charset="0"/>
-              </a:rPr>
-              <a:t>2) Các máy tính có thể kết nối cũng như sử dụng được dữ liệu nội bộ, hệ thống quản lý sản xuất (DProS, DProS2), hệ thống quản lý nhân sự (HRM), hệ thống quản lý kho ……</a:t>
-            </a:r>
-          </a:p>
-        </p:txBody>
-      </p:sp>
-    </p:spTree>
-    <p:extLst>
-      <p:ext uri="{BB962C8B-B14F-4D97-AF65-F5344CB8AC3E}">
-        <p14:creationId xmlns:p14="http://schemas.microsoft.com/office/powerpoint/2010/main" val="4147281821"/>
       </p:ext>
     </p:extLst>
   </p:cSld>
@@ -9398,8 +11821,8 @@
         </p:blipFill>
         <p:spPr>
           <a:xfrm>
-            <a:off x="611560" y="1124743"/>
-            <a:ext cx="5472608" cy="3331903"/>
+            <a:off x="611560" y="978048"/>
+            <a:ext cx="6840760" cy="4164879"/>
           </a:xfrm>
           <a:prstGeom prst="rect">
             <a:avLst/>
@@ -9408,10 +11831,10 @@
       </p:pic>
       <p:sp>
         <p:nvSpPr>
-          <p:cNvPr id="3" name="TextBox 2">
+          <p:cNvPr id="10" name="TextBox 9">
             <a:extLst>
               <a:ext uri="{FF2B5EF4-FFF2-40B4-BE49-F238E27FC236}">
-                <a16:creationId xmlns:a16="http://schemas.microsoft.com/office/drawing/2014/main" id="{A4CE9D7D-E9A7-F144-2464-6FCFA78452DD}"/>
+                <a16:creationId xmlns:a16="http://schemas.microsoft.com/office/drawing/2014/main" id="{6082423F-AA4A-0B14-7F1A-ED5A5F3C50B8}"/>
               </a:ext>
             </a:extLst>
           </p:cNvPr>
@@ -9420,8 +11843,8 @@
         </p:nvSpPr>
         <p:spPr>
           <a:xfrm>
-            <a:off x="608559" y="4550139"/>
-            <a:ext cx="720080" cy="338554"/>
+            <a:off x="467544" y="5142927"/>
+            <a:ext cx="8424936" cy="1169551"/>
           </a:xfrm>
           <a:prstGeom prst="rect">
             <a:avLst/>
@@ -9435,11 +11858,29 @@
           <a:lstStyle/>
           <a:p>
             <a:r>
-              <a:rPr lang="en-US" sz="1600">
-                <a:latin typeface="Times New Roman" panose="02020603050405020304" pitchFamily="18" charset="0"/>
-                <a:cs typeface="Times New Roman" panose="02020603050405020304" pitchFamily="18" charset="0"/>
-              </a:rPr>
-              <a:t>Ví dụ:</a:t>
+              <a:rPr lang="en-US" sz="1400" b="1">
+                <a:latin typeface="Times New Roman" panose="02020603050405020304" pitchFamily="18" charset="0"/>
+                <a:cs typeface="Times New Roman" panose="02020603050405020304" pitchFamily="18" charset="0"/>
+              </a:rPr>
+              <a:t>Công ty Đông Dương đang sử dụng 3 đường mạng riêng biệt được cung cấp bởi nhà mạng VPNT cho hệ thống máy tính của 3 nhà máy với  mục đích chính:</a:t>
+            </a:r>
+          </a:p>
+          <a:p>
+            <a:r>
+              <a:rPr lang="en-US" sz="1400">
+                <a:latin typeface="Times New Roman" panose="02020603050405020304" pitchFamily="18" charset="0"/>
+                <a:cs typeface="Times New Roman" panose="02020603050405020304" pitchFamily="18" charset="0"/>
+              </a:rPr>
+              <a:t>1) Truy cập Internet để phục vụ công việc phòng ban cũng như trao đổi công việc với khách hàng….</a:t>
+            </a:r>
+          </a:p>
+          <a:p>
+            <a:r>
+              <a:rPr lang="en-US" sz="1400">
+                <a:latin typeface="Times New Roman" panose="02020603050405020304" pitchFamily="18" charset="0"/>
+                <a:cs typeface="Times New Roman" panose="02020603050405020304" pitchFamily="18" charset="0"/>
+              </a:rPr>
+              <a:t>2) Các máy tính có thể kết nối cũng như sử dụng được dữ liệu nội bộ, hệ thống quản lý sản xuất (DProS, DProS2), hệ thống quản lý nhân sự (HRM), hệ thống quản lý kho ……</a:t>
             </a:r>
           </a:p>
         </p:txBody>
@@ -9447,7 +11888,7 @@
     </p:spTree>
     <p:extLst>
       <p:ext uri="{BB962C8B-B14F-4D97-AF65-F5344CB8AC3E}">
-        <p14:creationId xmlns:p14="http://schemas.microsoft.com/office/powerpoint/2010/main" val="3469257942"/>
+        <p14:creationId xmlns:p14="http://schemas.microsoft.com/office/powerpoint/2010/main" val="4147281821"/>
       </p:ext>
     </p:extLst>
   </p:cSld>
